--- a/Curriculo/Fase3_Basico2/decks/Basico2_S01_Jay.pptx
+++ b/Curriculo/Fase3_Basico2/decks/Basico2_S01_Jay.pptx
@@ -133,7 +133,7 @@
   <p:extLst>
     <p:ext uri="{521415D9-36F7-43E2-AB2F-B90AF26B5E84}">
       <p14:sectionLst xmlns:p14="http://schemas.microsoft.com/office/powerpoint/2010/main">
-        <p14:section name="Semana 1" id="{3FCCDFD7-4DBA-1EB0-6913-7817D51112B1}">
+        <p14:section name="Semana 1" id="{3923E0BA-6F9E-E590-78F5-6A68D00A1D23}">
           <p14:sldIdLst>
             <p14:sldId id="256"/>
             <p14:sldId id="257"/>
@@ -198,7 +198,7 @@
     </p:spTree>
     <p:extLst>
       <p:ext uri="{BB962C8B-B14F-4D97-AF65-F5344CB8AC3E}">
-        <p14:creationId xmlns:p14="http://schemas.microsoft.com/office/powerpoint/2010/main" val="3985561709"/>
+        <p14:creationId xmlns:p14="http://schemas.microsoft.com/office/powerpoint/2010/main" val="4046545120"/>
       </p:ext>
     </p:extLst>
   </p:cSld>
@@ -612,7 +612,7 @@
             <a:r>
               <a:rPr lang="en-US" dirty="0"/>
               <a:t>21:16–21:18 (1 min 20 + cadena 1 min). «있어요 ya lo conocen: 'hay' y 'está'. Hoy suma 'tener': en coreano no se 'tiene' un hermano, 'hay' un hermano.» Lo que hay lleva 이/가; quien lo tiene, si lo dices, va con 은/는 (저는 형제가 없어요); a los de julio: el contrario es 없어요, nunca 안 있어요. «누가 대학생이에요?» (levanta la mano) «…다니엘 씨가 대학생이에요. Y si eres tú: 제가요!» Cadena: «카밀라 씨, 형제가 있어요?» → responde y le pregunta a otro (3 eslabones); cierra con «누가 회사원이에요?» → manos arriba y algún «제가요!».
-Imagen sugerida: Íconos simples de familia (hermanos mayores y menores), estilo de la casa, sin rojo
+Imagen: incluida (dibujo de la casa).
 Fuente: Nueva (idea de A1_Nivel_1/Repaso_MidTerm_A1.pptx L18, sin romanización)
 Lámina 12</a:t>
             </a:r>
@@ -791,7 +791,7 @@
             <a:r>
               <a:rPr lang="en-US" dirty="0"/>
               <a:t>21:19–21:20 (50 s). «¿Por qué 있어요 suena [이써요]? Cuando una sílaba termina en consonante y la siguiente empieza con ㅇ, la silla vacía de Básico 1, la consonante se muda a esa silla. Por eso nunca decimos 살–아–요, con un corte entre sílabas.» «Dos excepciones: la ㅇ de abajo no se muda (고향이에요: se queda abajo, como en 강) y la ㅎ de abajo se cae antes de vocal (좋아해요 [조아해요]).» Coro una vez: «따라 하세요: 직업이에요 — 살아요 — 있어요.» La segunda vuelta queda para el cierre y la sección 4 del material.
-Imagen sugerida: Animación: la ㄹ de 살 se muda a la silla vacía (ㅇ) de 아 → [사라요]
+Imagen: incluida (dibujo de la casa).
 Fuente: Nueva
 Lámina 14</a:t>
             </a:r>
@@ -881,7 +881,7 @@
             <a:r>
               <a:rPr lang="en-US" dirty="0"/>
               <a:t>21:20–21:21 (1 min). «Al conocerse, en Corea se hace una pequeña inclinación, el 인사, y se dice 반갑습니다. En el trabajo también es común darse la mano (악수), inclinando un poco la cabeza. Donde nosotros damos la mano o un beso en la mejilla, la inclinación hace ese trabajo.» Demuéstralo: leve, unos 15 grados, mirando hacia abajo un segundo. «Y si alguien te pregunta la edad apenas te conoce, no es mala educación: sirve para saber cómo hablarte. La semana que viene aprenden a decir la suya.»
-Imagen sugerida: Foto con licencia libre de dos adultos inclinándose levemente al conocerse
+Imagen: incluida (dibujo de la casa).
 Fuente: Nueva (no reusar Sesion_03_Saludos.pptx L7, que dice que en Corea no se dan la mano)
 Lámina 15</a:t>
             </a:r>
@@ -1149,7 +1149,7 @@
             <a:r>
               <a:rPr lang="en-US" dirty="0"/>
               <a:t>21:24 (con L17). «Cuando lean su nombre en un mensaje, vuelven a la sala principal: 'Salir de la sala' → 'Salir de la sala para grupos'. ¡No 'salir de la reunión'! Conversamos 2 minutos sin leer y vuelven: 'Salas para grupos' → su número → 'Unirse'.» «No es un examen: no tiene nota. Si no alcanzo a llamarte, me mandas un audio: está en tu material. Al entrar a la sala: 안녕하세요 y una inclinación. 화이팅!»
-Imagen sugerida: Capturas de Zoom: 'Salir de la sala' → 'Salir de la sala para grupos' (con aviso: no 'Salir de la reunión') y 'Salas para grupos' → número de sala → 'Unirse'
+Imagen pendiente: Hacer 2 capturas en Zoom de escritorio (interfaz en español) en una reunión de prueba con salas para grupos abiertas y 'elegir sala' activado, entrando como participante con un segundo dispositivo: (1) dentro de una sala, el menú del botón 'Salir de la sala' abierto, con 'Salir de la sala para grupos' marcado con un recuadro azul #4236F6 y 'Salir de la reunión' tachado con una X gris (nunca roja); (2) en la sala principal, el botón 'Salas para grupos' → la lista con el número de sala y el botón 'Unirse' marcado en azul. Recortar para que no se vean nombres ni correos, ponerlas lado a lado con una flecha y pegarlas en la lámina.
 Fuente: Nueva
 Lámina 18</a:t>
             </a:r>
@@ -1328,7 +1328,6 @@
             <a:r>
               <a:rPr lang="en-US" dirty="0"/>
               <a:t>21:03, unos segundos. «¡Bienvenidos a Básico 2!» Hoy nos volvemos a presentar con detalle y converso 2 minutos con cada uno. Pasa enseguida a L3.
-Imagen sugerida: Logo azul de Academia Seúl (plantilla de la casa)
 Fuente: Portada de la plantilla
 Lámina 2</a:t>
             </a:r>
@@ -1418,7 +1417,7 @@
             <a:r>
               <a:rPr lang="en-US" dirty="0"/>
               <a:t>Opcional, durante el diagnóstico. Muestra la foto de tu escritorio (o tu escritorio real) y pregunta «책상 위에 뭐가 있어요?»: mide 이/가, posiciones y objetos. Un alumno sin cámara la responde igual, mirando su propio escritorio.
-Imagen sugerida: Foto del escritorio de Jay
+Imagen: incluida (dibujo de la casa).
 Fuente: Jay
 Lámina 19b</a:t>
             </a:r>
@@ -2220,7 +2219,7 @@
             <a:r>
               <a:rPr lang="en-US" dirty="0"/>
               <a:t>21:04–21:05 (1 min, pensado para los de julio). «Los de julio se acuerdan de los corchetes con nuestras letras. Desde hoy, el corchete va en 한글.» Da las cuatro razones de la lámina; en la tercera: «있어요 se dice [이써요], y hoy van a entender por qué». «Si una palabra no les sale: la escuchan (en la grabación, en el Lector, en los audios de su material o en una nota de voz mía en el grupo) y miran el corchete. El texto completo está en la sección 2 de su material.»
-Imagen sugerida: Cuatro íconos simples, uno por razón (estilo de la casa, sin rojo)
+Imagen: incluida (dibujo de la casa).
 Fuente: Diseño, sección D
 Lámina 4</a:t>
             </a:r>
@@ -2310,7 +2309,7 @@
             <a:r>
               <a:rPr lang="en-US" dirty="0"/>
               <a:t>21:05–21:07. Las frases aparecen de a una junto a su foto; di cada una dos veces, primero despacio y después a velocidad natural, y en la primera haz la leve inclinación con 반갑습니다. Son datos de ejemplo: cámbialos por los tuyos (sin mascota: «우리 집에 강아지가 없어요.»; sin hermanos: «형제가 없어요. 외동이에요.»). No traduzcas: la comprensión se revisa en L6.
-Imagen sugerida: 6 fotos de Jay, una por frase: su ciudad natal, su ciudad de hoy, su trabajo, su familia, su pasatiempo y su mascota (fotos propias)
+Imagen pendiente: Elegir fotos propias, una por frase y en este orden: 1) Jay sonriendo o saludando (안녕하세요! 저는 김재희예요); 2) Seúl, su ciudad natal, y Santiago, donde vive hoy (dos fotos o un collage de las dos); 3) Jay dando clase (선생님); 4) Jay con su 누나 o una foto de familia; 5) Jay haciendo ejercicio (운동); 6) su perrito 두부. Fotos horizontales, sin terceros identificables sin su permiso (la clase se graba). Si cambia un dato de la frase (sin mascota, sin hermanos), la foto acompaña su versión. Pegarlas en PowerPoint junto a cada frase, para que aparezcan de a una con la animación.
 Fuente: Nueva · fotos de Jay
 Lámina 5</a:t>
             </a:r>
@@ -3909,7 +3908,7 @@
                 <a:ea typeface="Malgun Gothic" pitchFamily="34" charset="-122"/>
                 <a:cs typeface="Malgun Gothic" pitchFamily="34" charset="-120"/>
               </a:rPr>
-              <a:t>Teclado, consonantes a la izquierda: A S D F G = ㅁ ㄴ ㅇ ㄹ ㅎ</a:t>
+              <a:t>Teclado, consonantes a la izquierda: A S D F G = ㅁ ㄴ ㅇ ㄹ ㅎ</a:t>
             </a:r>
             <a:endParaRPr lang="en-US" sz="2200" dirty="0"/>
           </a:p>
@@ -3930,7 +3929,7 @@
                 <a:ea typeface="Malgun Gothic" pitchFamily="34" charset="-122"/>
                 <a:cs typeface="Malgun Gothic" pitchFamily="34" charset="-120"/>
               </a:rPr>
-              <a:t>Vocales a la derecha: H J K L = ㅗ ㅓ ㅏ ㅣ</a:t>
+              <a:t>Vocales a la derecha: H J K L = ㅗ ㅓ ㅏ ㅣ</a:t>
             </a:r>
             <a:endParaRPr lang="en-US" sz="2200" dirty="0"/>
           </a:p>
@@ -4242,7 +4241,7 @@
         <p:spPr>
           <a:xfrm>
             <a:off x="548640" y="1325880"/>
-            <a:ext cx="11064240" cy="457200"/>
+            <a:ext cx="11091672" cy="457200"/>
           </a:xfrm>
           <a:prstGeom prst="rect">
             <a:avLst/>
@@ -4367,7 +4366,7 @@
           <p:nvPr>
             <p:extLst>
               <p:ext uri="{D42A27DB-BD31-4B8C-83A1-F6EECF244321}">
-                <p14:modId xmlns:p14="http://schemas.microsoft.com/office/powerpoint/2010/main" val="1533968946"/>
+                <p14:modId xmlns:p14="http://schemas.microsoft.com/office/powerpoint/2010/main" val="45013329"/>
               </p:ext>
             </p:extLst>
           </p:nvPr>
@@ -5372,7 +5371,7 @@
         <p:spPr>
           <a:xfrm>
             <a:off x="548640" y="1325880"/>
-            <a:ext cx="11064240" cy="548640"/>
+            <a:ext cx="11091672" cy="548640"/>
           </a:xfrm>
           <a:prstGeom prst="rect">
             <a:avLst/>
@@ -6172,7 +6171,7 @@
               <a:buNone/>
             </a:pPr>
             <a:r>
-              <a:rPr lang="ko-KR" altLang="en-US" sz="2400" dirty="0">
+              <a:rPr lang="ko-KR" altLang="en-US" sz="1900" dirty="0">
                 <a:solidFill>
                   <a:srgbClr val="14142B"/>
                 </a:solidFill>
@@ -6183,7 +6182,7 @@
               <a:t>d) 제 고향</a:t>
             </a:r>
             <a:r>
-              <a:rPr lang="en-US" sz="2400" dirty="0">
+              <a:rPr lang="en-US" sz="1900" dirty="0">
                 <a:solidFill>
                   <a:srgbClr val="14142B"/>
                 </a:solidFill>
@@ -6191,7 +6190,7 @@
               <a:t>___ </a:t>
             </a:r>
             <a:r>
-              <a:rPr lang="ko-KR" altLang="en-US" sz="2400" dirty="0">
+              <a:rPr lang="ko-KR" altLang="en-US" sz="1900" dirty="0">
                 <a:solidFill>
                   <a:srgbClr val="14142B"/>
                 </a:solidFill>
@@ -6202,7 +6201,7 @@
               <a:t>부산이에요</a:t>
             </a:r>
             <a:r>
-              <a:rPr lang="en-US" sz="2400" dirty="0">
+              <a:rPr lang="en-US" sz="1900" dirty="0">
                 <a:solidFill>
                   <a:srgbClr val="14142B"/>
                 </a:solidFill>
@@ -6210,7 +6209,7 @@
               <a:t>. </a:t>
             </a:r>
             <a:r>
-              <a:rPr lang="ko-KR" altLang="en-US" sz="2400" dirty="0">
+              <a:rPr lang="ko-KR" altLang="en-US" sz="1900" dirty="0">
                 <a:solidFill>
                   <a:srgbClr val="14142B"/>
                 </a:solidFill>
@@ -6221,7 +6220,7 @@
               <a:t>지금</a:t>
             </a:r>
             <a:r>
-              <a:rPr lang="en-US" sz="2400" dirty="0">
+              <a:rPr lang="en-US" sz="1900" dirty="0">
                 <a:solidFill>
                   <a:srgbClr val="14142B"/>
                 </a:solidFill>
@@ -6229,7 +6228,7 @@
               <a:t>___ </a:t>
             </a:r>
             <a:r>
-              <a:rPr lang="ko-KR" altLang="en-US" sz="2400" dirty="0">
+              <a:rPr lang="ko-KR" altLang="en-US" sz="1900" dirty="0">
                 <a:solidFill>
                   <a:srgbClr val="14142B"/>
                 </a:solidFill>
@@ -6240,14 +6239,14 @@
               <a:t>서울에 살아요</a:t>
             </a:r>
             <a:r>
-              <a:rPr lang="en-US" sz="2400" dirty="0">
+              <a:rPr lang="en-US" sz="1900" dirty="0">
                 <a:solidFill>
                   <a:srgbClr val="14142B"/>
                 </a:solidFill>
               </a:rPr>
               <a:t>.</a:t>
             </a:r>
-            <a:endParaRPr lang="en-US" sz="2400" dirty="0"/>
+            <a:endParaRPr lang="en-US" sz="1900" dirty="0"/>
           </a:p>
         </p:txBody>
       </p:sp>
@@ -7431,7 +7430,7 @@
         <p:spPr>
           <a:xfrm>
             <a:off x="548640" y="1325880"/>
-            <a:ext cx="11064240" cy="457200"/>
+            <a:ext cx="11091672" cy="457200"/>
           </a:xfrm>
           <a:prstGeom prst="rect">
             <a:avLst/>
@@ -7547,15 +7546,39 @@
           </a:p>
         </p:txBody>
       </p:sp>
-      <p:sp>
-        <p:nvSpPr>
-          <p:cNvPr id="6" name="Text 4"/>
+      <p:pic>
+        <p:nvPicPr>
+          <p:cNvPr id="6" name="col_img_0" descr="C:\Users\Chingu\AppData\Local\Temp\claude\C--Users-Chingu-Desktop-ACADEMIASEULWEB\d4111e1b-5523-44ea-97b2-b1a1d9545b9e\scratchpad\decks\cache\img_35cbeaf9e0f86c7d.png"/>
+          <p:cNvPicPr>
+            <a:picLocks noChangeAspect="1"/>
+          </p:cNvPicPr>
+          <p:nvPr/>
+        </p:nvPicPr>
+        <p:blipFill>
+          <a:blip r:embed="rId3"/>
+          <a:stretch>
+            <a:fillRect/>
+          </a:stretch>
+        </p:blipFill>
+        <p:spPr>
+          <a:xfrm>
+            <a:off x="2487168" y="2651760"/>
+            <a:ext cx="1508760" cy="685800"/>
+          </a:xfrm>
+          <a:prstGeom prst="rect">
+            <a:avLst/>
+          </a:prstGeom>
+        </p:spPr>
+      </p:pic>
+      <p:sp>
+        <p:nvSpPr>
+          <p:cNvPr id="7" name="Text 4"/>
           <p:cNvSpPr txBox="1"/>
           <p:nvPr/>
         </p:nvSpPr>
         <p:spPr>
           <a:xfrm>
-            <a:off x="777240" y="2651760"/>
+            <a:off x="777240" y="3429000"/>
             <a:ext cx="4928616" cy="914400"/>
           </a:xfrm>
           <a:prstGeom prst="rect">
@@ -7609,14 +7632,14 @@
       </p:sp>
       <p:sp>
         <p:nvSpPr>
-          <p:cNvPr id="7" name="lista"/>
+          <p:cNvPr id="8" name="lista"/>
           <p:cNvSpPr txBox="1"/>
           <p:nvPr/>
         </p:nvSpPr>
         <p:spPr>
           <a:xfrm>
-            <a:off x="731520" y="3657600"/>
-            <a:ext cx="5020056" cy="2377440"/>
+            <a:off x="731520" y="4434840"/>
+            <a:ext cx="5020056" cy="1600200"/>
           </a:xfrm>
           <a:prstGeom prst="rect">
             <a:avLst/>
@@ -7638,7 +7661,7 @@
               <a:buChar char="•"/>
             </a:pPr>
             <a:r>
-              <a:rPr lang="ko-KR" altLang="en-US" sz="2000" dirty="0">
+              <a:rPr lang="ko-KR" altLang="en-US" sz="1400" dirty="0">
                 <a:solidFill>
                   <a:srgbClr val="14142B"/>
                 </a:solidFill>
@@ -7649,14 +7672,14 @@
               <a:t>형제가 있어요</a:t>
             </a:r>
             <a:r>
-              <a:rPr lang="en-US" sz="2000" dirty="0">
+              <a:rPr lang="en-US" sz="1400" dirty="0">
                 <a:solidFill>
                   <a:srgbClr val="14142B"/>
                 </a:solidFill>
               </a:rPr>
               <a:t>?</a:t>
             </a:r>
-            <a:endParaRPr lang="en-US" sz="2000" dirty="0"/>
+            <a:endParaRPr lang="en-US" sz="1400" dirty="0"/>
           </a:p>
           <a:p>
             <a:pPr marL="228600" indent="-228600" eaLnBrk="1">
@@ -7667,7 +7690,7 @@
               <a:buChar char="•"/>
             </a:pPr>
             <a:r>
-              <a:rPr lang="ko-KR" altLang="en-US" sz="2000" dirty="0">
+              <a:rPr lang="ko-KR" altLang="en-US" sz="1400" dirty="0">
                 <a:solidFill>
                   <a:srgbClr val="14142B"/>
                 </a:solidFill>
@@ -7678,7 +7701,7 @@
               <a:t>네</a:t>
             </a:r>
             <a:r>
-              <a:rPr lang="en-US" sz="2000" dirty="0">
+              <a:rPr lang="en-US" sz="1400" dirty="0">
                 <a:solidFill>
                   <a:srgbClr val="14142B"/>
                 </a:solidFill>
@@ -7686,7 +7709,7 @@
               <a:t>, </a:t>
             </a:r>
             <a:r>
-              <a:rPr lang="ko-KR" altLang="en-US" sz="2000" dirty="0">
+              <a:rPr lang="ko-KR" altLang="en-US" sz="1400" dirty="0">
                 <a:solidFill>
                   <a:srgbClr val="14142B"/>
                 </a:solidFill>
@@ -7694,17 +7717,17 @@
                 <a:ea typeface="Malgun Gothic" pitchFamily="34" charset="-122"/>
                 <a:cs typeface="Malgun Gothic" pitchFamily="34" charset="-120"/>
               </a:rPr>
-              <a:t>오빠가 한 명 있어요</a:t>
-            </a:r>
-            <a:r>
-              <a:rPr lang="en-US" sz="2000" dirty="0">
+              <a:t>오빠가 한 명 있어요</a:t>
+            </a:r>
+            <a:r>
+              <a:rPr lang="en-US" sz="1400" dirty="0">
                 <a:solidFill>
                   <a:srgbClr val="14142B"/>
                 </a:solidFill>
               </a:rPr>
               <a:t>.</a:t>
             </a:r>
-            <a:endParaRPr lang="en-US" sz="2000" dirty="0"/>
+            <a:endParaRPr lang="en-US" sz="1400" dirty="0"/>
           </a:p>
           <a:p>
             <a:pPr marL="228600" indent="-228600" eaLnBrk="1">
@@ -7715,7 +7738,7 @@
               <a:buChar char="•"/>
             </a:pPr>
             <a:r>
-              <a:rPr lang="ko-KR" altLang="en-US" sz="2000" dirty="0">
+              <a:rPr lang="ko-KR" altLang="en-US" sz="1400" dirty="0">
                 <a:solidFill>
                   <a:srgbClr val="14142B"/>
                 </a:solidFill>
@@ -7726,7 +7749,7 @@
               <a:t>아니요</a:t>
             </a:r>
             <a:r>
-              <a:rPr lang="en-US" sz="2000" dirty="0">
+              <a:rPr lang="en-US" sz="1400" dirty="0">
                 <a:solidFill>
                   <a:srgbClr val="14142B"/>
                 </a:solidFill>
@@ -7734,7 +7757,7 @@
               <a:t>, </a:t>
             </a:r>
             <a:r>
-              <a:rPr lang="ko-KR" altLang="en-US" sz="2000" dirty="0">
+              <a:rPr lang="ko-KR" altLang="en-US" sz="1400" dirty="0">
                 <a:solidFill>
                   <a:srgbClr val="14142B"/>
                 </a:solidFill>
@@ -7745,7 +7768,7 @@
               <a:t>없어요</a:t>
             </a:r>
             <a:r>
-              <a:rPr lang="en-US" sz="2000" dirty="0">
+              <a:rPr lang="en-US" sz="1400" dirty="0">
                 <a:solidFill>
                   <a:srgbClr val="14142B"/>
                 </a:solidFill>
@@ -7753,7 +7776,7 @@
               <a:t>. </a:t>
             </a:r>
             <a:r>
-              <a:rPr lang="ko-KR" altLang="en-US" sz="2000" dirty="0">
+              <a:rPr lang="ko-KR" altLang="en-US" sz="1400" dirty="0">
                 <a:solidFill>
                   <a:srgbClr val="14142B"/>
                 </a:solidFill>
@@ -7764,14 +7787,14 @@
               <a:t>외동이에요</a:t>
             </a:r>
             <a:r>
-              <a:rPr lang="en-US" sz="2000" dirty="0">
+              <a:rPr lang="en-US" sz="1400" dirty="0">
                 <a:solidFill>
                   <a:srgbClr val="14142B"/>
                 </a:solidFill>
               </a:rPr>
               <a:t>.</a:t>
             </a:r>
-            <a:endParaRPr lang="en-US" sz="2000" dirty="0"/>
+            <a:endParaRPr lang="en-US" sz="1400" dirty="0"/>
           </a:p>
           <a:p>
             <a:pPr marL="228600" indent="-228600" eaLnBrk="1">
@@ -7782,7 +7805,7 @@
               <a:buChar char="•"/>
             </a:pPr>
             <a:r>
-              <a:rPr lang="ko-KR" altLang="en-US" sz="2000" dirty="0">
+              <a:rPr lang="ko-KR" altLang="en-US" sz="1400" dirty="0">
                 <a:solidFill>
                   <a:srgbClr val="14142B"/>
                 </a:solidFill>
@@ -7793,14 +7816,14 @@
               <a:t>저는 형제가 없어요</a:t>
             </a:r>
             <a:r>
-              <a:rPr lang="en-US" sz="2000" dirty="0">
+              <a:rPr lang="en-US" sz="1400" dirty="0">
                 <a:solidFill>
                   <a:srgbClr val="14142B"/>
                 </a:solidFill>
               </a:rPr>
               <a:t>.</a:t>
             </a:r>
-            <a:endParaRPr lang="en-US" sz="2000" dirty="0"/>
+            <a:endParaRPr lang="en-US" sz="1400" dirty="0"/>
           </a:p>
           <a:p>
             <a:pPr marL="228600" indent="-228600" eaLnBrk="1">
@@ -7811,7 +7834,7 @@
               <a:buChar char="•"/>
             </a:pPr>
             <a:r>
-              <a:rPr lang="ko-KR" altLang="en-US" sz="2000" dirty="0">
+              <a:rPr lang="ko-KR" altLang="en-US" sz="1400" dirty="0">
                 <a:solidFill>
                   <a:srgbClr val="14142B"/>
                 </a:solidFill>
@@ -7822,7 +7845,7 @@
               <a:t>No tener: 없어요 </a:t>
             </a:r>
             <a:r>
-              <a:rPr lang="en-US" sz="2000" dirty="0">
+              <a:rPr lang="en-US" sz="1400" dirty="0">
                 <a:solidFill>
                   <a:srgbClr val="14142B"/>
                 </a:solidFill>
@@ -7830,7 +7853,7 @@
               <a:t>(nunca </a:t>
             </a:r>
             <a:r>
-              <a:rPr lang="ko-KR" altLang="en-US" sz="2000" dirty="0">
+              <a:rPr lang="ko-KR" altLang="en-US" sz="1400" dirty="0">
                 <a:solidFill>
                   <a:srgbClr val="14142B"/>
                 </a:solidFill>
@@ -7841,20 +7864,20 @@
               <a:t>안 있어요</a:t>
             </a:r>
             <a:r>
-              <a:rPr lang="en-US" sz="2000" dirty="0">
+              <a:rPr lang="en-US" sz="1400" dirty="0">
                 <a:solidFill>
                   <a:srgbClr val="14142B"/>
                 </a:solidFill>
               </a:rPr>
               <a:t>)</a:t>
             </a:r>
-            <a:endParaRPr lang="en-US" sz="2000" dirty="0"/>
+            <a:endParaRPr lang="en-US" sz="1400" dirty="0"/>
           </a:p>
         </p:txBody>
       </p:sp>
       <p:sp>
         <p:nvSpPr>
-          <p:cNvPr id="8" name="col_1"/>
+          <p:cNvPr id="9" name="col_1"/>
           <p:cNvSpPr/>
           <p:nvPr/>
         </p:nvSpPr>
@@ -7881,7 +7904,7 @@
       </p:sp>
       <p:sp>
         <p:nvSpPr>
-          <p:cNvPr id="9" name="Text 7"/>
+          <p:cNvPr id="10" name="Text 7"/>
           <p:cNvSpPr txBox="1"/>
           <p:nvPr/>
         </p:nvSpPr>
@@ -7917,15 +7940,39 @@
           </a:p>
         </p:txBody>
       </p:sp>
-      <p:sp>
-        <p:nvSpPr>
-          <p:cNvPr id="10" name="Text 8"/>
+      <p:pic>
+        <p:nvPicPr>
+          <p:cNvPr id="11" name="col_img_1" descr="C:\Users\Chingu\AppData\Local\Temp\claude\C--Users-Chingu-Desktop-ACADEMIASEULWEB\d4111e1b-5523-44ea-97b2-b1a1d9545b9e\scratchpad\decks\cache\img_ed9dd9808ebe3120.png"/>
+          <p:cNvPicPr>
+            <a:picLocks noChangeAspect="1"/>
+          </p:cNvPicPr>
+          <p:nvPr/>
+        </p:nvPicPr>
+        <p:blipFill>
+          <a:blip r:embed="rId4"/>
+          <a:stretch>
+            <a:fillRect/>
+          </a:stretch>
+        </p:blipFill>
+        <p:spPr>
+          <a:xfrm>
+            <a:off x="7790688" y="2651760"/>
+            <a:ext cx="2313432" cy="1051560"/>
+          </a:xfrm>
+          <a:prstGeom prst="rect">
+            <a:avLst/>
+          </a:prstGeom>
+        </p:spPr>
+      </p:pic>
+      <p:sp>
+        <p:nvSpPr>
+          <p:cNvPr id="12" name="Text 8"/>
           <p:cNvSpPr txBox="1"/>
           <p:nvPr/>
         </p:nvSpPr>
         <p:spPr>
           <a:xfrm>
-            <a:off x="6483096" y="2651760"/>
+            <a:off x="6483096" y="3794760"/>
             <a:ext cx="4928616" cy="914400"/>
           </a:xfrm>
           <a:prstGeom prst="rect">
@@ -7998,14 +8045,14 @@
       </p:sp>
       <p:sp>
         <p:nvSpPr>
-          <p:cNvPr id="11" name="lista"/>
+          <p:cNvPr id="13" name="lista"/>
           <p:cNvSpPr txBox="1"/>
           <p:nvPr/>
         </p:nvSpPr>
         <p:spPr>
           <a:xfrm>
-            <a:off x="6437376" y="3657600"/>
-            <a:ext cx="5020056" cy="2377440"/>
+            <a:off x="6437376" y="4800600"/>
+            <a:ext cx="5020056" cy="1234440"/>
           </a:xfrm>
           <a:prstGeom prst="rect">
             <a:avLst/>
@@ -8267,7 +8314,7 @@
         <p:spPr>
           <a:xfrm>
             <a:off x="548640" y="1325880"/>
-            <a:ext cx="11064240" cy="457200"/>
+            <a:ext cx="11091672" cy="457200"/>
           </a:xfrm>
           <a:prstGeom prst="rect">
             <a:avLst/>
@@ -8316,7 +8363,7 @@
           <p:nvPr>
             <p:extLst>
               <p:ext uri="{D42A27DB-BD31-4B8C-83A1-F6EECF244321}">
-                <p14:modId xmlns:p14="http://schemas.microsoft.com/office/powerpoint/2010/main" val="283281038"/>
+                <p14:modId xmlns:p14="http://schemas.microsoft.com/office/powerpoint/2010/main" val="2129697439"/>
               </p:ext>
             </p:extLst>
           </p:nvPr>
@@ -9663,16 +9710,40 @@
           </a:p>
         </p:txBody>
       </p:sp>
-      <p:sp>
-        <p:nvSpPr>
-          <p:cNvPr id="3" name="Text 1"/>
+      <p:pic>
+        <p:nvPicPr>
+          <p:cNvPr id="3" name="imagen" descr="C:\Users\Chingu\AppData\Local\Temp\claude\C--Users-Chingu-Desktop-ACADEMIASEULWEB\d4111e1b-5523-44ea-97b2-b1a1d9545b9e\scratchpad\decks\cache\img_121dd1172e94b1cc.png"/>
+          <p:cNvPicPr>
+            <a:picLocks noChangeAspect="1"/>
+          </p:cNvPicPr>
+          <p:nvPr/>
+        </p:nvPicPr>
+        <p:blipFill>
+          <a:blip r:embed="rId3"/>
+          <a:stretch>
+            <a:fillRect/>
+          </a:stretch>
+        </p:blipFill>
+        <p:spPr>
+          <a:xfrm>
+            <a:off x="7754112" y="1508760"/>
+            <a:ext cx="3886200" cy="4480560"/>
+          </a:xfrm>
+          <a:prstGeom prst="rect">
+            <a:avLst/>
+          </a:prstGeom>
+        </p:spPr>
+      </p:pic>
+      <p:sp>
+        <p:nvSpPr>
+          <p:cNvPr id="4" name="Text 1"/>
           <p:cNvSpPr txBox="1"/>
           <p:nvPr/>
         </p:nvSpPr>
         <p:spPr>
           <a:xfrm>
             <a:off x="548640" y="1325880"/>
-            <a:ext cx="11064240" cy="457200"/>
+            <a:ext cx="6931152" cy="457200"/>
           </a:xfrm>
           <a:prstGeom prst="rect">
             <a:avLst/>
@@ -9721,35 +9792,35 @@
           <p:nvPr>
             <p:extLst>
               <p:ext uri="{D42A27DB-BD31-4B8C-83A1-F6EECF244321}">
-                <p14:modId xmlns:p14="http://schemas.microsoft.com/office/powerpoint/2010/main" val="1618459465"/>
+                <p14:modId xmlns:p14="http://schemas.microsoft.com/office/powerpoint/2010/main" val="3771173691"/>
               </p:ext>
             </p:extLst>
           </p:nvPr>
         </p:nvGraphicFramePr>
         <p:xfrm>
           <a:off x="548640" y="1874520"/>
-          <a:ext cx="11091672" cy="914400"/>
+          <a:ext cx="6931152" cy="914400"/>
         </p:xfrm>
         <a:graphic>
           <a:graphicData uri="http://schemas.openxmlformats.org/drawingml/2006/table">
             <a:tbl>
               <a:tblPr/>
               <a:tblGrid>
-                <a:gridCol w="3697224">
+                <a:gridCol w="2310384">
                   <a:extLst>
                     <a:ext uri="{9D8B030D-6E8A-4147-A177-3AD203B41FA5}">
                       <a16:colId xmlns:a16="http://schemas.microsoft.com/office/drawing/2014/main" val="20000"/>
                     </a:ext>
                   </a:extLst>
                 </a:gridCol>
-                <a:gridCol w="3697224">
+                <a:gridCol w="2310384">
                   <a:extLst>
                     <a:ext uri="{9D8B030D-6E8A-4147-A177-3AD203B41FA5}">
                       <a16:colId xmlns:a16="http://schemas.microsoft.com/office/drawing/2014/main" val="20001"/>
                     </a:ext>
                   </a:extLst>
                 </a:gridCol>
-                <a:gridCol w="3697224">
+                <a:gridCol w="2310384">
                   <a:extLst>
                     <a:ext uri="{9D8B030D-6E8A-4147-A177-3AD203B41FA5}">
                       <a16:colId xmlns:a16="http://schemas.microsoft.com/office/drawing/2014/main" val="20002"/>
@@ -11618,7 +11689,7 @@
         <p:spPr>
           <a:xfrm>
             <a:off x="548640" y="1325880"/>
-            <a:ext cx="6949440" cy="548640"/>
+            <a:ext cx="5669280" cy="548640"/>
           </a:xfrm>
           <a:prstGeom prst="rect">
             <a:avLst/>
@@ -11678,7 +11749,7 @@
         <p:spPr>
           <a:xfrm>
             <a:off x="548640" y="1965960"/>
-            <a:ext cx="6949440" cy="4206240"/>
+            <a:ext cx="5669280" cy="4206240"/>
           </a:xfrm>
           <a:prstGeom prst="rect">
             <a:avLst/>
@@ -11806,12 +11877,12 @@
         </p:nvSpPr>
         <p:spPr>
           <a:xfrm>
-            <a:off x="8001000" y="1417320"/>
-            <a:ext cx="3611880" cy="4480560"/>
+            <a:off x="6446520" y="1371600"/>
+            <a:ext cx="5193792" cy="4800600"/>
           </a:xfrm>
           <a:prstGeom prst="roundRect">
             <a:avLst>
-              <a:gd name="adj" fmla="val 6329"/>
+              <a:gd name="adj" fmla="val 4762"/>
             </a:avLst>
           </a:prstGeom>
           <a:solidFill>
@@ -11825,72 +11896,30 @@
           </a:ln>
         </p:spPr>
       </p:sp>
-      <p:sp>
-        <p:nvSpPr>
-          <p:cNvPr id="6" name="ko_grande"/>
-          <p:cNvSpPr txBox="1"/>
+      <p:pic>
+        <p:nvPicPr>
+          <p:cNvPr id="6" name="imagen" descr="C:\Users\Chingu\AppData\Local\Temp\claude\C--Users-Chingu-Desktop-ACADEMIASEULWEB\d4111e1b-5523-44ea-97b2-b1a1d9545b9e\scratchpad\decks\cache\img_d4e7dec4453c6bd7.png"/>
+          <p:cNvPicPr>
+            <a:picLocks noChangeAspect="1"/>
+          </p:cNvPicPr>
           <p:nvPr/>
-        </p:nvSpPr>
+        </p:nvPicPr>
+        <p:blipFill>
+          <a:blip r:embed="rId3"/>
+          <a:stretch>
+            <a:fillRect/>
+          </a:stretch>
+        </p:blipFill>
         <p:spPr>
           <a:xfrm>
-            <a:off x="8092440" y="1874520"/>
-            <a:ext cx="3429000" cy="2926080"/>
+            <a:off x="7040833" y="1463040"/>
+            <a:ext cx="4005165" cy="4617720"/>
           </a:xfrm>
           <a:prstGeom prst="rect">
             <a:avLst/>
           </a:prstGeom>
-          <a:noFill/>
-          <a:ln/>
         </p:spPr>
-        <p:txBody>
-          <a:bodyPr wrap="square" lIns="0" tIns="0" rIns="0" bIns="0" rtlCol="0" anchor="ctr">
-            <a:normAutofit/>
-          </a:bodyPr>
-          <a:lstStyle/>
-          <a:p>
-            <a:pPr marL="0" indent="0" algn="ctr" eaLnBrk="1">
-              <a:buNone/>
-            </a:pPr>
-            <a:r>
-              <a:rPr lang="ko-KR" altLang="en-US" sz="4600" b="1" dirty="0">
-                <a:solidFill>
-                  <a:srgbClr val="4236F6"/>
-                </a:solidFill>
-                <a:latin typeface="Malgun Gothic" pitchFamily="34" charset="0"/>
-                <a:ea typeface="Malgun Gothic" pitchFamily="34" charset="-122"/>
-                <a:cs typeface="Malgun Gothic" pitchFamily="34" charset="-120"/>
-              </a:rPr>
-              <a:t>인사 </a:t>
-            </a:r>
-            <a:r>
-              <a:rPr lang="en-US" sz="4600" b="1" dirty="0">
-                <a:solidFill>
-                  <a:srgbClr val="4236F6"/>
-                </a:solidFill>
-              </a:rPr>
-              <a:t>·</a:t>
-            </a:r>
-            <a:endParaRPr lang="en-US" sz="4600" dirty="0"/>
-          </a:p>
-          <a:p>
-            <a:pPr marL="0" indent="0" algn="ctr" eaLnBrk="1">
-              <a:buNone/>
-            </a:pPr>
-            <a:r>
-              <a:rPr lang="ko-KR" altLang="en-US" sz="4600" b="1" dirty="0">
-                <a:solidFill>
-                  <a:srgbClr val="4236F6"/>
-                </a:solidFill>
-                <a:latin typeface="Malgun Gothic" pitchFamily="34" charset="0"/>
-                <a:ea typeface="Malgun Gothic" pitchFamily="34" charset="-122"/>
-                <a:cs typeface="Malgun Gothic" pitchFamily="34" charset="-120"/>
-              </a:rPr>
-              <a:t>반갑습니다</a:t>
-            </a:r>
-            <a:endParaRPr lang="en-US" sz="4600" dirty="0"/>
-          </a:p>
-        </p:txBody>
-      </p:sp>
+      </p:pic>
       <p:sp>
         <p:nvSpPr>
           <p:cNvPr id="25" name="Slide Number Placeholder 0"/>
@@ -12592,7 +12621,7 @@
         <p:spPr>
           <a:xfrm>
             <a:off x="548640" y="1325880"/>
-            <a:ext cx="11064240" cy="457200"/>
+            <a:ext cx="11091672" cy="457200"/>
           </a:xfrm>
           <a:prstGeom prst="rect">
             <a:avLst/>
@@ -12630,7 +12659,7 @@
           <p:nvPr>
             <p:extLst>
               <p:ext uri="{D42A27DB-BD31-4B8C-83A1-F6EECF244321}">
-                <p14:modId xmlns:p14="http://schemas.microsoft.com/office/powerpoint/2010/main" val="4071447370"/>
+                <p14:modId xmlns:p14="http://schemas.microsoft.com/office/powerpoint/2010/main" val="2397444357"/>
               </p:ext>
             </p:extLst>
           </p:nvPr>
@@ -14496,7 +14525,7 @@
                   <a:srgbClr val="5C5F6B"/>
                 </a:solidFill>
               </a:rPr>
-              <a:t>Capturas de Zoom: 'Salir de la sala' → 'Salir de la sala para grupos' (con aviso: no 'Salir de la reunión') y 'Salas para grupos' → número de sala → 'Unirse'</a:t>
+              <a:t>Hacer 2 capturas en Zoom de escritorio (interfaz en español) en una reunión de prueba con salas para grupos abiertas y 'elegir sala' activado, entrando como participante con un segundo dispositivo: (1) dentro de una sala, el menú del botón 'Salir de la sala' abierto, con 'Salir de la sala para grupos' marcado con un recuadro azul #4236F6 y 'Salir de la reunión' tachado con una X gris (nunca roja); (2) en la sala principal, el botón 'Salas para grupos' → la lista con el número de sala y el botón 'Unirse' marcado en azul. Recortar para que no se vean nombres ni correos, ponerlas lado a lado con una flecha y pegarlas en la lámina.</a:t>
             </a:r>
             <a:endParaRPr lang="en-US" sz="1600" dirty="0"/>
           </a:p>
@@ -14756,7 +14785,7 @@
               <a:buNone/>
             </a:pPr>
             <a:r>
-              <a:rPr lang="ko-KR" altLang="en-US" sz="8700" b="1" dirty="0">
+              <a:rPr lang="ko-KR" altLang="en-US" sz="4800" b="1" dirty="0">
                 <a:solidFill>
                   <a:srgbClr val="4236F6"/>
                 </a:solidFill>
@@ -14766,7 +14795,7 @@
               </a:rPr>
               <a:t>생일</a:t>
             </a:r>
-            <a:endParaRPr lang="en-US" sz="8700" dirty="0"/>
+            <a:endParaRPr lang="en-US" sz="4800" dirty="0"/>
           </a:p>
         </p:txBody>
       </p:sp>
@@ -14824,7 +14853,7 @@
               <a:buNone/>
             </a:pPr>
             <a:r>
-              <a:rPr lang="ko-KR" altLang="en-US" sz="8100" b="1" dirty="0">
+              <a:rPr lang="ko-KR" altLang="en-US" sz="4800" b="1" dirty="0">
                 <a:solidFill>
                   <a:srgbClr val="4236F6"/>
                 </a:solidFill>
@@ -14834,7 +14863,7 @@
               </a:rPr>
               <a:t>없어요</a:t>
             </a:r>
-            <a:endParaRPr lang="en-US" sz="8100" dirty="0"/>
+            <a:endParaRPr lang="en-US" sz="4800" dirty="0"/>
           </a:p>
         </p:txBody>
       </p:sp>
@@ -14892,7 +14921,7 @@
               <a:buNone/>
             </a:pPr>
             <a:r>
-              <a:rPr lang="ko-KR" altLang="en-US" sz="6100" b="1" dirty="0">
+              <a:rPr lang="ko-KR" altLang="en-US" sz="4800" b="1" dirty="0">
                 <a:solidFill>
                   <a:srgbClr val="4236F6"/>
                 </a:solidFill>
@@ -14902,7 +14931,7 @@
               </a:rPr>
               <a:t>좋아해요</a:t>
             </a:r>
-            <a:endParaRPr lang="en-US" sz="6100" dirty="0"/>
+            <a:endParaRPr lang="en-US" sz="4800" dirty="0"/>
           </a:p>
         </p:txBody>
       </p:sp>
@@ -14960,7 +14989,7 @@
               <a:buNone/>
             </a:pPr>
             <a:r>
-              <a:rPr lang="ko-KR" altLang="en-US" sz="8100" b="1" dirty="0">
+              <a:rPr lang="ko-KR" altLang="en-US" sz="4800" b="1" dirty="0">
                 <a:solidFill>
                   <a:srgbClr val="4236F6"/>
                 </a:solidFill>
@@ -14970,7 +14999,7 @@
               </a:rPr>
               <a:t>읽어요</a:t>
             </a:r>
-            <a:endParaRPr lang="en-US" sz="8100" dirty="0"/>
+            <a:endParaRPr lang="en-US" sz="4800" dirty="0"/>
           </a:p>
         </p:txBody>
       </p:sp>
@@ -15326,16 +15355,40 @@
           </a:p>
         </p:txBody>
       </p:sp>
-      <p:sp>
-        <p:nvSpPr>
-          <p:cNvPr id="3" name="panel"/>
+      <p:pic>
+        <p:nvPicPr>
+          <p:cNvPr id="3" name="imagen" descr="C:\Users\Chingu\AppData\Local\Temp\claude\C--Users-Chingu-Desktop-ACADEMIASEULWEB\d4111e1b-5523-44ea-97b2-b1a1d9545b9e\scratchpad\decks\cache\img_9a3c58549e171cc2.png"/>
+          <p:cNvPicPr>
+            <a:picLocks noChangeAspect="1"/>
+          </p:cNvPicPr>
+          <p:nvPr/>
+        </p:nvPicPr>
+        <p:blipFill>
+          <a:blip r:embed="rId3"/>
+          <a:stretch>
+            <a:fillRect/>
+          </a:stretch>
+        </p:blipFill>
+        <p:spPr>
+          <a:xfrm>
+            <a:off x="7754112" y="1508760"/>
+            <a:ext cx="3886200" cy="4480560"/>
+          </a:xfrm>
+          <a:prstGeom prst="rect">
+            <a:avLst/>
+          </a:prstGeom>
+        </p:spPr>
+      </p:pic>
+      <p:sp>
+        <p:nvSpPr>
+          <p:cNvPr id="4" name="panel"/>
           <p:cNvSpPr/>
           <p:nvPr/>
         </p:nvSpPr>
         <p:spPr>
           <a:xfrm>
-            <a:off x="1280160" y="1645920"/>
-            <a:ext cx="9628632" cy="3108960"/>
+            <a:off x="548640" y="1645920"/>
+            <a:ext cx="6931152" cy="3108960"/>
           </a:xfrm>
           <a:prstGeom prst="roundRect">
             <a:avLst>
@@ -15355,14 +15408,14 @@
       </p:sp>
       <p:sp>
         <p:nvSpPr>
-          <p:cNvPr id="4" name="frase_ko"/>
+          <p:cNvPr id="5" name="frase_ko"/>
           <p:cNvSpPr txBox="1"/>
           <p:nvPr/>
         </p:nvSpPr>
         <p:spPr>
           <a:xfrm>
-            <a:off x="1463040" y="1828800"/>
-            <a:ext cx="9262872" cy="1828800"/>
+            <a:off x="731520" y="1828800"/>
+            <a:ext cx="6565392" cy="1828800"/>
           </a:xfrm>
           <a:prstGeom prst="rect">
             <a:avLst/>
@@ -15380,7 +15433,7 @@
               <a:buNone/>
             </a:pPr>
             <a:r>
-              <a:rPr lang="ko-KR" altLang="en-US" sz="6200" b="1" dirty="0">
+              <a:rPr lang="ko-KR" altLang="en-US" sz="5700" b="1" dirty="0">
                 <a:solidFill>
                   <a:srgbClr val="4236F6"/>
                 </a:solidFill>
@@ -15388,30 +15441,47 @@
                 <a:ea typeface="Malgun Gothic" pitchFamily="34" charset="-122"/>
                 <a:cs typeface="Malgun Gothic" pitchFamily="34" charset="-120"/>
               </a:rPr>
-              <a:t>책상 위에 뭐가 있어요</a:t>
-            </a:r>
-            <a:r>
-              <a:rPr lang="en-US" sz="6200" b="1" dirty="0">
+              <a:t>책상 위에</a:t>
+            </a:r>
+            <a:endParaRPr lang="en-US" sz="5700" dirty="0"/>
+          </a:p>
+          <a:p>
+            <a:pPr marL="0" indent="0" algn="ctr" eaLnBrk="1">
+              <a:buNone/>
+            </a:pPr>
+            <a:r>
+              <a:rPr lang="ko-KR" altLang="en-US" sz="5700" b="1" dirty="0">
                 <a:solidFill>
                   <a:srgbClr val="4236F6"/>
                 </a:solidFill>
+                <a:latin typeface="Malgun Gothic" pitchFamily="34" charset="0"/>
+                <a:ea typeface="Malgun Gothic" pitchFamily="34" charset="-122"/>
+                <a:cs typeface="Malgun Gothic" pitchFamily="34" charset="-120"/>
+              </a:rPr>
+              <a:t>뭐가 있어요</a:t>
+            </a:r>
+            <a:r>
+              <a:rPr lang="en-US" sz="5700" b="1" dirty="0">
+                <a:solidFill>
+                  <a:srgbClr val="4236F6"/>
+                </a:solidFill>
               </a:rPr>
               <a:t>?</a:t>
             </a:r>
-            <a:endParaRPr lang="en-US" sz="6200" dirty="0"/>
+            <a:endParaRPr lang="en-US" sz="5700" dirty="0"/>
           </a:p>
         </p:txBody>
       </p:sp>
       <p:sp>
         <p:nvSpPr>
-          <p:cNvPr id="5" name="Text 3"/>
+          <p:cNvPr id="6" name="Text 3"/>
           <p:cNvSpPr txBox="1"/>
           <p:nvPr/>
         </p:nvSpPr>
         <p:spPr>
           <a:xfrm>
-            <a:off x="1463040" y="3657600"/>
-            <a:ext cx="9262872" cy="822960"/>
+            <a:off x="1051560" y="3657600"/>
+            <a:ext cx="5742432" cy="822960"/>
           </a:xfrm>
           <a:prstGeom prst="rect">
             <a:avLst/>
@@ -15442,14 +15512,14 @@
       </p:sp>
       <p:sp>
         <p:nvSpPr>
-          <p:cNvPr id="6" name="lista"/>
+          <p:cNvPr id="7" name="lista"/>
           <p:cNvSpPr txBox="1"/>
           <p:nvPr/>
         </p:nvSpPr>
         <p:spPr>
           <a:xfrm>
-            <a:off x="1280160" y="4937760"/>
-            <a:ext cx="9628632" cy="1234440"/>
+            <a:off x="548640" y="4937760"/>
+            <a:ext cx="6931152" cy="1234440"/>
           </a:xfrm>
           <a:prstGeom prst="rect">
             <a:avLst/>
@@ -15612,7 +15682,7 @@
         <p:spPr>
           <a:xfrm>
             <a:off x="548640" y="1325880"/>
-            <a:ext cx="11064240" cy="457200"/>
+            <a:ext cx="11091672" cy="457200"/>
           </a:xfrm>
           <a:prstGeom prst="rect">
             <a:avLst/>
@@ -15650,7 +15720,7 @@
           <p:nvPr>
             <p:extLst>
               <p:ext uri="{D42A27DB-BD31-4B8C-83A1-F6EECF244321}">
-                <p14:modId xmlns:p14="http://schemas.microsoft.com/office/powerpoint/2010/main" val="2486212799"/>
+                <p14:modId xmlns:p14="http://schemas.microsoft.com/office/powerpoint/2010/main" val="426681390"/>
               </p:ext>
             </p:extLst>
           </p:nvPr>
@@ -16973,7 +17043,7 @@
               <a:buChar char="•"/>
             </a:pPr>
             <a:r>
-              <a:rPr lang="ko-KR" altLang="en-US" sz="2400" dirty="0">
+              <a:rPr lang="ko-KR" altLang="en-US" sz="2800" dirty="0">
                 <a:solidFill>
                   <a:srgbClr val="14142B"/>
                 </a:solidFill>
@@ -16984,7 +17054,7 @@
               <a:t>저는 회사원이에요</a:t>
             </a:r>
             <a:r>
-              <a:rPr lang="en-US" sz="2400" dirty="0">
+              <a:rPr lang="en-US" sz="2800" dirty="0">
                 <a:solidFill>
                   <a:srgbClr val="14142B"/>
                 </a:solidFill>
@@ -16992,7 +17062,7 @@
               <a:t>. </a:t>
             </a:r>
             <a:r>
-              <a:rPr lang="ko-KR" altLang="en-US" sz="2400" dirty="0">
+              <a:rPr lang="ko-KR" altLang="en-US" sz="2800" dirty="0">
                 <a:solidFill>
                   <a:srgbClr val="14142B"/>
                 </a:solidFill>
@@ -17003,14 +17073,14 @@
               <a:t>학생이 아니에요</a:t>
             </a:r>
             <a:r>
-              <a:rPr lang="en-US" sz="2400" dirty="0">
+              <a:rPr lang="en-US" sz="2800" dirty="0">
                 <a:solidFill>
                   <a:srgbClr val="14142B"/>
                 </a:solidFill>
               </a:rPr>
               <a:t>. — Soy empleada de oficina. No soy estudiante.</a:t>
             </a:r>
-            <a:endParaRPr lang="en-US" sz="2400" dirty="0"/>
+            <a:endParaRPr lang="en-US" sz="2800" dirty="0"/>
           </a:p>
           <a:p>
             <a:pPr marL="228600" indent="-228600" eaLnBrk="1">
@@ -17021,7 +17091,7 @@
               <a:buChar char="•"/>
             </a:pPr>
             <a:r>
-              <a:rPr lang="ko-KR" altLang="en-US" sz="2400" dirty="0">
+              <a:rPr lang="ko-KR" altLang="en-US" sz="2800" dirty="0">
                 <a:solidFill>
                   <a:srgbClr val="14142B"/>
                 </a:solidFill>
@@ -17032,14 +17102,14 @@
               <a:t>산티아고에 살아요</a:t>
             </a:r>
             <a:r>
-              <a:rPr lang="en-US" sz="2400" dirty="0">
+              <a:rPr lang="en-US" sz="2800" dirty="0">
                 <a:solidFill>
                   <a:srgbClr val="14142B"/>
                 </a:solidFill>
               </a:rPr>
               <a:t>. — Vivo en Santiago.</a:t>
             </a:r>
-            <a:endParaRPr lang="en-US" sz="2400" dirty="0"/>
+            <a:endParaRPr lang="en-US" sz="2800" dirty="0"/>
           </a:p>
           <a:p>
             <a:pPr marL="228600" indent="-228600" eaLnBrk="1">
@@ -17050,7 +17120,7 @@
               <a:buChar char="•"/>
             </a:pPr>
             <a:r>
-              <a:rPr lang="ko-KR" altLang="en-US" sz="2400" dirty="0">
+              <a:rPr lang="ko-KR" altLang="en-US" sz="2800" dirty="0">
                 <a:solidFill>
                   <a:srgbClr val="14142B"/>
                 </a:solidFill>
@@ -17061,14 +17131,14 @@
               <a:t>취미가 뭐예요</a:t>
             </a:r>
             <a:r>
-              <a:rPr lang="en-US" sz="2400" dirty="0">
+              <a:rPr lang="en-US" sz="2800" dirty="0">
                 <a:solidFill>
                   <a:srgbClr val="14142B"/>
                 </a:solidFill>
               </a:rPr>
               <a:t>? — ¿Cuál es tu pasatiempo?</a:t>
             </a:r>
-            <a:endParaRPr lang="en-US" sz="2400" dirty="0"/>
+            <a:endParaRPr lang="en-US" sz="2800" dirty="0"/>
           </a:p>
         </p:txBody>
       </p:sp>
@@ -17264,7 +17334,7 @@
         <p:spPr>
           <a:xfrm>
             <a:off x="548640" y="1325880"/>
-            <a:ext cx="11064240" cy="457200"/>
+            <a:ext cx="11091672" cy="457200"/>
           </a:xfrm>
           <a:prstGeom prst="rect">
             <a:avLst/>
@@ -17302,7 +17372,7 @@
           <p:nvPr>
             <p:extLst>
               <p:ext uri="{D42A27DB-BD31-4B8C-83A1-F6EECF244321}">
-                <p14:modId xmlns:p14="http://schemas.microsoft.com/office/powerpoint/2010/main" val="916968600"/>
+                <p14:modId xmlns:p14="http://schemas.microsoft.com/office/powerpoint/2010/main" val="3548645203"/>
               </p:ext>
             </p:extLst>
           </p:nvPr>
@@ -19300,7 +19370,7 @@
               <a:buChar char="•"/>
             </a:pPr>
             <a:r>
-              <a:rPr lang="ko-KR" altLang="en-US" sz="2400" dirty="0">
+              <a:rPr lang="ko-KR" altLang="en-US" sz="2800" dirty="0">
                 <a:solidFill>
                   <a:srgbClr val="14142B"/>
                 </a:solidFill>
@@ -19311,14 +19381,14 @@
               <a:t>이 사람은 회사원이에요</a:t>
             </a:r>
             <a:r>
-              <a:rPr lang="en-US" sz="2400" dirty="0">
+              <a:rPr lang="en-US" sz="2800" dirty="0">
                 <a:solidFill>
                   <a:srgbClr val="14142B"/>
                 </a:solidFill>
               </a:rPr>
               <a:t>.</a:t>
             </a:r>
-            <a:endParaRPr lang="en-US" sz="2400" dirty="0"/>
+            <a:endParaRPr lang="en-US" sz="2800" dirty="0"/>
           </a:p>
           <a:p>
             <a:pPr marL="228600" indent="-228600" eaLnBrk="1">
@@ -19329,7 +19399,7 @@
               <a:buChar char="•"/>
             </a:pPr>
             <a:r>
-              <a:rPr lang="ko-KR" altLang="en-US" sz="2400" dirty="0">
+              <a:rPr lang="ko-KR" altLang="en-US" sz="2800" dirty="0">
                 <a:solidFill>
                   <a:srgbClr val="14142B"/>
                 </a:solidFill>
@@ -19340,14 +19410,14 @@
               <a:t>발파라이소에 살아요</a:t>
             </a:r>
             <a:r>
-              <a:rPr lang="en-US" sz="2400" dirty="0">
+              <a:rPr lang="en-US" sz="2800" dirty="0">
                 <a:solidFill>
                   <a:srgbClr val="14142B"/>
                 </a:solidFill>
               </a:rPr>
               <a:t>.</a:t>
             </a:r>
-            <a:endParaRPr lang="en-US" sz="2400" dirty="0"/>
+            <a:endParaRPr lang="en-US" sz="2800" dirty="0"/>
           </a:p>
           <a:p>
             <a:pPr marL="228600" indent="-228600" eaLnBrk="1">
@@ -19358,7 +19428,7 @@
               <a:buChar char="•"/>
             </a:pPr>
             <a:r>
-              <a:rPr lang="ko-KR" altLang="en-US" sz="2400" dirty="0">
+              <a:rPr lang="ko-KR" altLang="en-US" sz="2800" dirty="0">
                 <a:solidFill>
                   <a:srgbClr val="14142B"/>
                 </a:solidFill>
@@ -19369,14 +19439,14 @@
               <a:t>강아지가 있어요</a:t>
             </a:r>
             <a:r>
-              <a:rPr lang="en-US" sz="2400" dirty="0">
+              <a:rPr lang="en-US" sz="2800" dirty="0">
                 <a:solidFill>
                   <a:srgbClr val="14142B"/>
                 </a:solidFill>
               </a:rPr>
               <a:t>.</a:t>
             </a:r>
-            <a:endParaRPr lang="en-US" sz="2400" dirty="0"/>
+            <a:endParaRPr lang="en-US" sz="2800" dirty="0"/>
           </a:p>
           <a:p>
             <a:pPr marL="228600" indent="-228600" eaLnBrk="1">
@@ -19387,7 +19457,7 @@
               <a:buChar char="•"/>
             </a:pPr>
             <a:r>
-              <a:rPr lang="ko-KR" altLang="en-US" sz="2400" dirty="0">
+              <a:rPr lang="ko-KR" altLang="en-US" sz="2800" dirty="0">
                 <a:solidFill>
                   <a:srgbClr val="14142B"/>
                 </a:solidFill>
@@ -19398,14 +19468,14 @@
               <a:t>누구예요</a:t>
             </a:r>
             <a:r>
-              <a:rPr lang="en-US" sz="2400" dirty="0">
+              <a:rPr lang="en-US" sz="2800" dirty="0">
                 <a:solidFill>
                   <a:srgbClr val="14142B"/>
                 </a:solidFill>
               </a:rPr>
               <a:t>? → Escribe el nombre en el chat</a:t>
             </a:r>
-            <a:endParaRPr lang="en-US" sz="2400" dirty="0"/>
+            <a:endParaRPr lang="en-US" sz="2800" dirty="0"/>
           </a:p>
         </p:txBody>
       </p:sp>
@@ -19654,7 +19724,7 @@
         <p:spPr>
           <a:xfrm>
             <a:off x="548640" y="1325880"/>
-            <a:ext cx="11064240" cy="457200"/>
+            <a:ext cx="11091672" cy="457200"/>
           </a:xfrm>
           <a:prstGeom prst="rect">
             <a:avLst/>
@@ -19820,7 +19890,7 @@
               <a:buChar char="•"/>
             </a:pPr>
             <a:r>
-              <a:rPr lang="ko-KR" altLang="en-US" sz="2000" dirty="0">
+              <a:rPr lang="ko-KR" altLang="en-US" sz="1200" dirty="0">
                 <a:solidFill>
                   <a:srgbClr val="14142B"/>
                 </a:solidFill>
@@ -19831,14 +19901,14 @@
               <a:t>의사 </a:t>
             </a:r>
             <a:r>
-              <a:rPr lang="en-US" sz="2000" dirty="0">
+              <a:rPr lang="en-US" sz="1200" dirty="0">
                 <a:solidFill>
                   <a:srgbClr val="14142B"/>
                 </a:solidFill>
               </a:rPr>
               <a:t>· médico/a</a:t>
             </a:r>
-            <a:endParaRPr lang="en-US" sz="2000" dirty="0"/>
+            <a:endParaRPr lang="en-US" sz="1200" dirty="0"/>
           </a:p>
           <a:p>
             <a:pPr marL="228600" indent="-228600" eaLnBrk="1">
@@ -19849,7 +19919,7 @@
               <a:buChar char="•"/>
             </a:pPr>
             <a:r>
-              <a:rPr lang="ko-KR" altLang="en-US" sz="2000" dirty="0">
+              <a:rPr lang="ko-KR" altLang="en-US" sz="1200" dirty="0">
                 <a:solidFill>
                   <a:srgbClr val="14142B"/>
                 </a:solidFill>
@@ -19860,14 +19930,14 @@
               <a:t>간호사 </a:t>
             </a:r>
             <a:r>
-              <a:rPr lang="en-US" sz="2000" dirty="0">
+              <a:rPr lang="en-US" sz="1200" dirty="0">
                 <a:solidFill>
                   <a:srgbClr val="14142B"/>
                 </a:solidFill>
               </a:rPr>
               <a:t>· enfermero/a</a:t>
             </a:r>
-            <a:endParaRPr lang="en-US" sz="2000" dirty="0"/>
+            <a:endParaRPr lang="en-US" sz="1200" dirty="0"/>
           </a:p>
           <a:p>
             <a:pPr marL="228600" indent="-228600" eaLnBrk="1">
@@ -19878,7 +19948,7 @@
               <a:buChar char="•"/>
             </a:pPr>
             <a:r>
-              <a:rPr lang="ko-KR" altLang="en-US" sz="2000" dirty="0">
+              <a:rPr lang="ko-KR" altLang="en-US" sz="1200" dirty="0">
                 <a:solidFill>
                   <a:srgbClr val="14142B"/>
                 </a:solidFill>
@@ -19889,14 +19959,14 @@
               <a:t>엔지니어 </a:t>
             </a:r>
             <a:r>
-              <a:rPr lang="en-US" sz="2000" dirty="0">
+              <a:rPr lang="en-US" sz="1200" dirty="0">
                 <a:solidFill>
                   <a:srgbClr val="14142B"/>
                 </a:solidFill>
               </a:rPr>
               <a:t>· ingeniero/a</a:t>
             </a:r>
-            <a:endParaRPr lang="en-US" sz="2000" dirty="0"/>
+            <a:endParaRPr lang="en-US" sz="1200" dirty="0"/>
           </a:p>
           <a:p>
             <a:pPr marL="228600" indent="-228600" eaLnBrk="1">
@@ -19907,7 +19977,7 @@
               <a:buChar char="•"/>
             </a:pPr>
             <a:r>
-              <a:rPr lang="ko-KR" altLang="en-US" sz="2000" dirty="0">
+              <a:rPr lang="ko-KR" altLang="en-US" sz="1200" dirty="0">
                 <a:solidFill>
                   <a:srgbClr val="14142B"/>
                 </a:solidFill>
@@ -19918,14 +19988,14 @@
               <a:t>디자이너 </a:t>
             </a:r>
             <a:r>
-              <a:rPr lang="en-US" sz="2000" dirty="0">
+              <a:rPr lang="en-US" sz="1200" dirty="0">
                 <a:solidFill>
                   <a:srgbClr val="14142B"/>
                 </a:solidFill>
               </a:rPr>
               <a:t>· diseñador/a</a:t>
             </a:r>
-            <a:endParaRPr lang="en-US" sz="2000" dirty="0"/>
+            <a:endParaRPr lang="en-US" sz="1200" dirty="0"/>
           </a:p>
           <a:p>
             <a:pPr marL="228600" indent="-228600" eaLnBrk="1">
@@ -19936,7 +20006,7 @@
               <a:buChar char="•"/>
             </a:pPr>
             <a:r>
-              <a:rPr lang="ko-KR" altLang="en-US" sz="2000" dirty="0">
+              <a:rPr lang="ko-KR" altLang="en-US" sz="1200" dirty="0">
                 <a:solidFill>
                   <a:srgbClr val="14142B"/>
                 </a:solidFill>
@@ -19947,14 +20017,14 @@
               <a:t>프로그래머 </a:t>
             </a:r>
             <a:r>
-              <a:rPr lang="en-US" sz="2000" dirty="0">
+              <a:rPr lang="en-US" sz="1200" dirty="0">
                 <a:solidFill>
                   <a:srgbClr val="14142B"/>
                 </a:solidFill>
               </a:rPr>
               <a:t>· programador/a</a:t>
             </a:r>
-            <a:endParaRPr lang="en-US" sz="2000" dirty="0"/>
+            <a:endParaRPr lang="en-US" sz="1200" dirty="0"/>
           </a:p>
           <a:p>
             <a:pPr marL="228600" indent="-228600" eaLnBrk="1">
@@ -19965,7 +20035,7 @@
               <a:buChar char="•"/>
             </a:pPr>
             <a:r>
-              <a:rPr lang="ko-KR" altLang="en-US" sz="2000" dirty="0">
+              <a:rPr lang="ko-KR" altLang="en-US" sz="1200" dirty="0">
                 <a:solidFill>
                   <a:srgbClr val="14142B"/>
                 </a:solidFill>
@@ -19976,14 +20046,14 @@
               <a:t>요리사 </a:t>
             </a:r>
             <a:r>
-              <a:rPr lang="en-US" sz="2000" dirty="0">
+              <a:rPr lang="en-US" sz="1200" dirty="0">
                 <a:solidFill>
                   <a:srgbClr val="14142B"/>
                 </a:solidFill>
               </a:rPr>
               <a:t>· cocinero/a</a:t>
             </a:r>
-            <a:endParaRPr lang="en-US" sz="2000" dirty="0"/>
+            <a:endParaRPr lang="en-US" sz="1200" dirty="0"/>
           </a:p>
           <a:p>
             <a:pPr marL="228600" indent="-228600" eaLnBrk="1">
@@ -19994,7 +20064,7 @@
               <a:buChar char="•"/>
             </a:pPr>
             <a:r>
-              <a:rPr lang="ko-KR" altLang="en-US" sz="2000" dirty="0">
+              <a:rPr lang="ko-KR" altLang="en-US" sz="1200" dirty="0">
                 <a:solidFill>
                   <a:srgbClr val="14142B"/>
                 </a:solidFill>
@@ -20005,14 +20075,14 @@
               <a:t>주부 </a:t>
             </a:r>
             <a:r>
-              <a:rPr lang="en-US" sz="2000" dirty="0">
+              <a:rPr lang="en-US" sz="1200" dirty="0">
                 <a:solidFill>
                   <a:srgbClr val="14142B"/>
                 </a:solidFill>
               </a:rPr>
               <a:t>· dueño/a de casa</a:t>
             </a:r>
-            <a:endParaRPr lang="en-US" sz="2000" dirty="0"/>
+            <a:endParaRPr lang="en-US" sz="1200" dirty="0"/>
           </a:p>
           <a:p>
             <a:pPr marL="228600" indent="-228600" eaLnBrk="1">
@@ -20023,7 +20093,7 @@
               <a:buChar char="•"/>
             </a:pPr>
             <a:r>
-              <a:rPr lang="ko-KR" altLang="en-US" sz="2000" dirty="0">
+              <a:rPr lang="ko-KR" altLang="en-US" sz="1200" dirty="0">
                 <a:solidFill>
                   <a:srgbClr val="14142B"/>
                 </a:solidFill>
@@ -20034,14 +20104,14 @@
               <a:t>변호사 </a:t>
             </a:r>
             <a:r>
-              <a:rPr lang="en-US" sz="2000" dirty="0">
+              <a:rPr lang="en-US" sz="1200" dirty="0">
                 <a:solidFill>
                   <a:srgbClr val="14142B"/>
                 </a:solidFill>
               </a:rPr>
               <a:t>· abogado/a</a:t>
             </a:r>
-            <a:endParaRPr lang="en-US" sz="2000" dirty="0"/>
+            <a:endParaRPr lang="en-US" sz="1200" dirty="0"/>
           </a:p>
           <a:p>
             <a:pPr marL="228600" indent="-228600" eaLnBrk="1">
@@ -20052,7 +20122,7 @@
               <a:buChar char="•"/>
             </a:pPr>
             <a:r>
-              <a:rPr lang="ko-KR" altLang="en-US" sz="2000" dirty="0">
+              <a:rPr lang="ko-KR" altLang="en-US" sz="1200" dirty="0">
                 <a:solidFill>
                   <a:srgbClr val="14142B"/>
                 </a:solidFill>
@@ -20063,14 +20133,14 @@
               <a:t>공무원 </a:t>
             </a:r>
             <a:r>
-              <a:rPr lang="en-US" sz="2000" dirty="0">
+              <a:rPr lang="en-US" sz="1200" dirty="0">
                 <a:solidFill>
                   <a:srgbClr val="14142B"/>
                 </a:solidFill>
               </a:rPr>
               <a:t>· funcionario/a público/a</a:t>
             </a:r>
-            <a:endParaRPr lang="en-US" sz="2000" dirty="0"/>
+            <a:endParaRPr lang="en-US" sz="1200" dirty="0"/>
           </a:p>
           <a:p>
             <a:pPr marL="228600" indent="-228600" eaLnBrk="1">
@@ -20081,7 +20151,7 @@
               <a:buChar char="•"/>
             </a:pPr>
             <a:r>
-              <a:rPr lang="ko-KR" altLang="en-US" sz="2000" dirty="0">
+              <a:rPr lang="ko-KR" altLang="en-US" sz="1200" dirty="0">
                 <a:solidFill>
                   <a:srgbClr val="14142B"/>
                 </a:solidFill>
@@ -20092,14 +20162,14 @@
               <a:t>프리랜서 </a:t>
             </a:r>
             <a:r>
-              <a:rPr lang="en-US" sz="2000" dirty="0">
+              <a:rPr lang="en-US" sz="1200" dirty="0">
                 <a:solidFill>
                   <a:srgbClr val="14142B"/>
                 </a:solidFill>
               </a:rPr>
               <a:t>· independiente</a:t>
             </a:r>
-            <a:endParaRPr lang="en-US" sz="2000" dirty="0"/>
+            <a:endParaRPr lang="en-US" sz="1200" dirty="0"/>
           </a:p>
         </p:txBody>
       </p:sp>
@@ -20284,7 +20354,7 @@
               <a:buChar char="•"/>
             </a:pPr>
             <a:r>
-              <a:rPr lang="ko-KR" altLang="en-US" sz="2000" dirty="0">
+              <a:rPr lang="ko-KR" altLang="en-US" sz="1800" dirty="0">
                 <a:solidFill>
                   <a:srgbClr val="14142B"/>
                 </a:solidFill>
@@ -20295,7 +20365,7 @@
               <a:t>요리 </a:t>
             </a:r>
             <a:r>
-              <a:rPr lang="en-US" sz="2000" dirty="0">
+              <a:rPr lang="en-US" sz="1800" dirty="0">
                 <a:solidFill>
                   <a:srgbClr val="14142B"/>
                 </a:solidFill>
@@ -20303,7 +20373,7 @@
               <a:t>· </a:t>
             </a:r>
             <a:r>
-              <a:rPr lang="ko-KR" altLang="en-US" sz="2000" dirty="0">
+              <a:rPr lang="ko-KR" altLang="en-US" sz="1800" dirty="0">
                 <a:solidFill>
                   <a:srgbClr val="14142B"/>
                 </a:solidFill>
@@ -20314,7 +20384,7 @@
               <a:t>운동 </a:t>
             </a:r>
             <a:r>
-              <a:rPr lang="en-US" sz="2000" dirty="0">
+              <a:rPr lang="en-US" sz="1800" dirty="0">
                 <a:solidFill>
                   <a:srgbClr val="14142B"/>
                 </a:solidFill>
@@ -20322,7 +20392,7 @@
               <a:t>· </a:t>
             </a:r>
             <a:r>
-              <a:rPr lang="ko-KR" altLang="en-US" sz="2000" dirty="0">
+              <a:rPr lang="ko-KR" altLang="en-US" sz="1800" dirty="0">
                 <a:solidFill>
                   <a:srgbClr val="14142B"/>
                 </a:solidFill>
@@ -20333,7 +20403,7 @@
               <a:t>여행 </a:t>
             </a:r>
             <a:r>
-              <a:rPr lang="en-US" sz="2000" dirty="0">
+              <a:rPr lang="en-US" sz="1800" dirty="0">
                 <a:solidFill>
                   <a:srgbClr val="14142B"/>
                 </a:solidFill>
@@ -20341,7 +20411,7 @@
               <a:t>· </a:t>
             </a:r>
             <a:r>
-              <a:rPr lang="ko-KR" altLang="en-US" sz="2000" dirty="0">
+              <a:rPr lang="ko-KR" altLang="en-US" sz="1800" dirty="0">
                 <a:solidFill>
                   <a:srgbClr val="14142B"/>
                 </a:solidFill>
@@ -20351,7 +20421,7 @@
               </a:rPr>
               <a:t>게임</a:t>
             </a:r>
-            <a:endParaRPr lang="en-US" sz="2000" dirty="0"/>
+            <a:endParaRPr lang="en-US" sz="1800" dirty="0"/>
           </a:p>
           <a:p>
             <a:pPr marL="228600" indent="-228600" eaLnBrk="1">
@@ -20362,7 +20432,7 @@
               <a:buChar char="•"/>
             </a:pPr>
             <a:r>
-              <a:rPr lang="ko-KR" altLang="en-US" sz="2000" dirty="0">
+              <a:rPr lang="ko-KR" altLang="en-US" sz="1800" dirty="0">
                 <a:solidFill>
                   <a:srgbClr val="14142B"/>
                 </a:solidFill>
@@ -20373,7 +20443,7 @@
               <a:t>등산 </a:t>
             </a:r>
             <a:r>
-              <a:rPr lang="en-US" sz="2000" dirty="0">
+              <a:rPr lang="en-US" sz="1800" dirty="0">
                 <a:solidFill>
                   <a:srgbClr val="14142B"/>
                 </a:solidFill>
@@ -20381,7 +20451,7 @@
               <a:t>(senderismo) · </a:t>
             </a:r>
             <a:r>
-              <a:rPr lang="ko-KR" altLang="en-US" sz="2000" dirty="0">
+              <a:rPr lang="ko-KR" altLang="en-US" sz="1800" dirty="0">
                 <a:solidFill>
                   <a:srgbClr val="14142B"/>
                 </a:solidFill>
@@ -20392,7 +20462,7 @@
               <a:t>독서 </a:t>
             </a:r>
             <a:r>
-              <a:rPr lang="en-US" sz="2000" dirty="0">
+              <a:rPr lang="en-US" sz="1800" dirty="0">
                 <a:solidFill>
                   <a:srgbClr val="14142B"/>
                 </a:solidFill>
@@ -20400,7 +20470,7 @@
               <a:t>(lectura) · </a:t>
             </a:r>
             <a:r>
-              <a:rPr lang="ko-KR" altLang="en-US" sz="2000" dirty="0">
+              <a:rPr lang="ko-KR" altLang="en-US" sz="1800" dirty="0">
                 <a:solidFill>
                   <a:srgbClr val="14142B"/>
                 </a:solidFill>
@@ -20410,7 +20480,7 @@
               </a:rPr>
               <a:t>노래</a:t>
             </a:r>
-            <a:endParaRPr lang="en-US" sz="2000" dirty="0"/>
+            <a:endParaRPr lang="en-US" sz="1800" dirty="0"/>
           </a:p>
           <a:p>
             <a:pPr marL="228600" indent="-228600" eaLnBrk="1">
@@ -20421,7 +20491,7 @@
               <a:buChar char="•"/>
             </a:pPr>
             <a:r>
-              <a:rPr lang="ko-KR" altLang="en-US" sz="2000" dirty="0">
+              <a:rPr lang="ko-KR" altLang="en-US" sz="1800" dirty="0">
                 <a:solidFill>
                   <a:srgbClr val="14142B"/>
                 </a:solidFill>
@@ -20432,7 +20502,7 @@
               <a:t>음악 감상 </a:t>
             </a:r>
             <a:r>
-              <a:rPr lang="en-US" sz="2000" dirty="0">
+              <a:rPr lang="en-US" sz="1800" dirty="0">
                 <a:solidFill>
                   <a:srgbClr val="14142B"/>
                 </a:solidFill>
@@ -20440,7 +20510,7 @@
               <a:t>· </a:t>
             </a:r>
             <a:r>
-              <a:rPr lang="ko-KR" altLang="en-US" sz="2000" dirty="0">
+              <a:rPr lang="ko-KR" altLang="en-US" sz="1800" dirty="0">
                 <a:solidFill>
                   <a:srgbClr val="14142B"/>
                 </a:solidFill>
@@ -20451,14 +20521,14 @@
               <a:t>영화 감상 </a:t>
             </a:r>
             <a:r>
-              <a:rPr lang="en-US" sz="2000" dirty="0">
+              <a:rPr lang="en-US" sz="1800" dirty="0">
                 <a:solidFill>
                   <a:srgbClr val="14142B"/>
                 </a:solidFill>
               </a:rPr>
               <a:t>(en bloque)</a:t>
             </a:r>
-            <a:endParaRPr lang="en-US" sz="2000" dirty="0"/>
+            <a:endParaRPr lang="en-US" sz="1800" dirty="0"/>
           </a:p>
           <a:p>
             <a:pPr marL="228600" indent="-228600" eaLnBrk="1">
@@ -20469,7 +20539,7 @@
               <a:buChar char="•"/>
             </a:pPr>
             <a:r>
-              <a:rPr lang="ko-KR" altLang="en-US" sz="2000" dirty="0">
+              <a:rPr lang="ko-KR" altLang="en-US" sz="1800" dirty="0">
                 <a:solidFill>
                   <a:srgbClr val="14142B"/>
                 </a:solidFill>
@@ -20480,7 +20550,7 @@
               <a:t>그림 그리기 </a:t>
             </a:r>
             <a:r>
-              <a:rPr lang="en-US" sz="2000" dirty="0">
+              <a:rPr lang="en-US" sz="1800" dirty="0">
                 <a:solidFill>
                   <a:srgbClr val="14142B"/>
                 </a:solidFill>
@@ -20488,7 +20558,7 @@
               <a:t>(dibujar) · </a:t>
             </a:r>
             <a:r>
-              <a:rPr lang="ko-KR" altLang="en-US" sz="2000" dirty="0">
+              <a:rPr lang="ko-KR" altLang="en-US" sz="1800" dirty="0">
                 <a:solidFill>
                   <a:srgbClr val="14142B"/>
                 </a:solidFill>
@@ -20499,14 +20569,14 @@
               <a:t>사진 찍기 </a:t>
             </a:r>
             <a:r>
-              <a:rPr lang="en-US" sz="2000" dirty="0">
+              <a:rPr lang="en-US" sz="1800" dirty="0">
                 <a:solidFill>
                   <a:srgbClr val="14142B"/>
                 </a:solidFill>
               </a:rPr>
               <a:t>(sacar fotos)</a:t>
             </a:r>
-            <a:endParaRPr lang="en-US" sz="2000" dirty="0"/>
+            <a:endParaRPr lang="en-US" sz="1800" dirty="0"/>
           </a:p>
           <a:p>
             <a:pPr marL="228600" indent="-228600" eaLnBrk="1">
@@ -20517,7 +20587,7 @@
               <a:buChar char="•"/>
             </a:pPr>
             <a:r>
-              <a:rPr lang="ko-KR" altLang="en-US" sz="2000" dirty="0">
+              <a:rPr lang="ko-KR" altLang="en-US" sz="1800" dirty="0">
                 <a:solidFill>
                   <a:srgbClr val="14142B"/>
                 </a:solidFill>
@@ -20528,7 +20598,7 @@
               <a:t>Con verbo: 드라마를 봐요 </a:t>
             </a:r>
             <a:r>
-              <a:rPr lang="en-US" sz="2000" dirty="0">
+              <a:rPr lang="en-US" sz="1800" dirty="0">
                 <a:solidFill>
                   <a:srgbClr val="14142B"/>
                 </a:solidFill>
@@ -20536,7 +20606,7 @@
               <a:t>· </a:t>
             </a:r>
             <a:r>
-              <a:rPr lang="ko-KR" altLang="en-US" sz="2000" dirty="0">
+              <a:rPr lang="ko-KR" altLang="en-US" sz="1800" dirty="0">
                 <a:solidFill>
                   <a:srgbClr val="14142B"/>
                 </a:solidFill>
@@ -20546,7 +20616,7 @@
               </a:rPr>
               <a:t>케이팝을 좋아해요</a:t>
             </a:r>
-            <a:endParaRPr lang="en-US" sz="2000" dirty="0"/>
+            <a:endParaRPr lang="en-US" sz="1800" dirty="0"/>
           </a:p>
         </p:txBody>
       </p:sp>
@@ -21151,7 +21221,7 @@
         <p:spPr>
           <a:xfrm>
             <a:off x="548640" y="1325880"/>
-            <a:ext cx="11064240" cy="457200"/>
+            <a:ext cx="11091672" cy="457200"/>
           </a:xfrm>
           <a:prstGeom prst="rect">
             <a:avLst/>
@@ -21189,7 +21259,7 @@
           <p:nvPr>
             <p:extLst>
               <p:ext uri="{D42A27DB-BD31-4B8C-83A1-F6EECF244321}">
-                <p14:modId xmlns:p14="http://schemas.microsoft.com/office/powerpoint/2010/main" val="1656628412"/>
+                <p14:modId xmlns:p14="http://schemas.microsoft.com/office/powerpoint/2010/main" val="2420784766"/>
               </p:ext>
             </p:extLst>
           </p:nvPr>
@@ -22513,7 +22583,7 @@
         <p:spPr>
           <a:xfrm>
             <a:off x="548640" y="1325880"/>
-            <a:ext cx="6949440" cy="548640"/>
+            <a:ext cx="5669280" cy="548640"/>
           </a:xfrm>
           <a:prstGeom prst="rect">
             <a:avLst/>
@@ -22638,7 +22708,7 @@
         <p:spPr>
           <a:xfrm>
             <a:off x="548640" y="1965960"/>
-            <a:ext cx="6949440" cy="4206240"/>
+            <a:ext cx="5669280" cy="4206240"/>
           </a:xfrm>
           <a:prstGeom prst="rect">
             <a:avLst/>
@@ -22792,12 +22862,12 @@
         </p:nvSpPr>
         <p:spPr>
           <a:xfrm>
-            <a:off x="8001000" y="1417320"/>
-            <a:ext cx="3611880" cy="4480560"/>
+            <a:off x="6446520" y="1371600"/>
+            <a:ext cx="5193792" cy="4800600"/>
           </a:xfrm>
           <a:prstGeom prst="roundRect">
             <a:avLst>
-              <a:gd name="adj" fmla="val 6329"/>
+              <a:gd name="adj" fmla="val 4762"/>
             </a:avLst>
           </a:prstGeom>
           <a:solidFill>
@@ -22811,58 +22881,30 @@
           </a:ln>
         </p:spPr>
       </p:sp>
-      <p:sp>
-        <p:nvSpPr>
-          <p:cNvPr id="6" name="imagen_pendiente"/>
-          <p:cNvSpPr txBox="1"/>
+      <p:pic>
+        <p:nvPicPr>
+          <p:cNvPr id="6" name="imagen" descr="C:\Users\Chingu\AppData\Local\Temp\claude\C--Users-Chingu-Desktop-ACADEMIASEULWEB\d4111e1b-5523-44ea-97b2-b1a1d9545b9e\scratchpad\decks\cache\img_349c73cb4f87d65d.png"/>
+          <p:cNvPicPr>
+            <a:picLocks noChangeAspect="1"/>
+          </p:cNvPicPr>
           <p:nvPr/>
-        </p:nvSpPr>
+        </p:nvPicPr>
+        <p:blipFill>
+          <a:blip r:embed="rId3"/>
+          <a:stretch>
+            <a:fillRect/>
+          </a:stretch>
+        </p:blipFill>
         <p:spPr>
           <a:xfrm>
-            <a:off x="8183880" y="1600200"/>
-            <a:ext cx="3246120" cy="4114800"/>
+            <a:off x="7040833" y="1463040"/>
+            <a:ext cx="4005165" cy="4617720"/>
           </a:xfrm>
           <a:prstGeom prst="rect">
             <a:avLst/>
           </a:prstGeom>
-          <a:noFill/>
-          <a:ln/>
         </p:spPr>
-        <p:txBody>
-          <a:bodyPr wrap="square" lIns="76200" tIns="76200" rIns="76200" bIns="76200" rtlCol="0" anchor="ctr">
-            <a:normAutofit/>
-          </a:bodyPr>
-          <a:lstStyle/>
-          <a:p>
-            <a:pPr marL="0" indent="0" algn="ctr" eaLnBrk="1">
-              <a:buNone/>
-            </a:pPr>
-            <a:r>
-              <a:rPr lang="en-US" sz="1600" b="1" dirty="0">
-                <a:solidFill>
-                  <a:srgbClr val="4236F6"/>
-                </a:solidFill>
-              </a:rPr>
-              <a:t>Imagen pendiente</a:t>
-            </a:r>
-            <a:endParaRPr lang="en-US" sz="1600" dirty="0"/>
-          </a:p>
-          <a:p>
-            <a:pPr marL="0" indent="0" algn="ctr" eaLnBrk="1">
-              <a:buNone/>
-            </a:pPr>
-            <a:r>
-              <a:rPr lang="en-US" sz="1300" dirty="0">
-                <a:solidFill>
-                  <a:srgbClr val="5C5F6B"/>
-                </a:solidFill>
-              </a:rPr>
-              <a:t>Cuatro íconos simples, uno por razón (estilo de la casa, sin rojo)</a:t>
-            </a:r>
-            <a:endParaRPr lang="en-US" sz="1600" dirty="0"/>
-          </a:p>
-        </p:txBody>
-      </p:sp>
+      </p:pic>
       <p:sp>
         <p:nvSpPr>
           <p:cNvPr id="25" name="Slide Number Placeholder 0"/>
@@ -23262,7 +23304,7 @@
                 <a:ea typeface="Malgun Gothic" pitchFamily="34" charset="-122"/>
                 <a:cs typeface="Malgun Gothic" pitchFamily="34" charset="-120"/>
               </a:rPr>
-              <a:t>누나가 한 명 있어요</a:t>
+              <a:t>누나가 한 명 있어요</a:t>
             </a:r>
             <a:r>
               <a:rPr lang="en-US" sz="2400" dirty="0">
@@ -23440,12 +23482,118 @@
               <a:buNone/>
             </a:pPr>
             <a:r>
+              <a:rPr lang="ko-KR" altLang="en-US" sz="1300" dirty="0">
+                <a:solidFill>
+                  <a:srgbClr val="5C5F6B"/>
+                </a:solidFill>
+                <a:latin typeface="Malgun Gothic" pitchFamily="34" charset="0"/>
+                <a:ea typeface="Malgun Gothic" pitchFamily="34" charset="-122"/>
+                <a:cs typeface="Malgun Gothic" pitchFamily="34" charset="-120"/>
+              </a:rPr>
+              <a:t>Elegir fotos propias, una por frase y en este orden: 1) Jay sonriendo o saludando (안녕하세요</a:t>
+            </a:r>
+            <a:r>
               <a:rPr lang="en-US" sz="1300" dirty="0">
                 <a:solidFill>
                   <a:srgbClr val="5C5F6B"/>
                 </a:solidFill>
               </a:rPr>
-              <a:t>6 fotos de Jay, una por frase: su ciudad natal, su ciudad de hoy, su trabajo, su familia, su pasatiempo y su mascota (fotos propias)</a:t>
+              <a:t>! </a:t>
+            </a:r>
+            <a:r>
+              <a:rPr lang="ko-KR" altLang="en-US" sz="1300" dirty="0">
+                <a:solidFill>
+                  <a:srgbClr val="5C5F6B"/>
+                </a:solidFill>
+                <a:latin typeface="Malgun Gothic" pitchFamily="34" charset="0"/>
+                <a:ea typeface="Malgun Gothic" pitchFamily="34" charset="-122"/>
+                <a:cs typeface="Malgun Gothic" pitchFamily="34" charset="-120"/>
+              </a:rPr>
+              <a:t>저는 김재희예요</a:t>
+            </a:r>
+            <a:r>
+              <a:rPr lang="en-US" sz="1300" dirty="0">
+                <a:solidFill>
+                  <a:srgbClr val="5C5F6B"/>
+                </a:solidFill>
+              </a:rPr>
+              <a:t>); 2) Seúl, su ciudad natal, y Santiago, donde vive hoy (dos fotos o un collage de las dos); 3) Jay dando clase (</a:t>
+            </a:r>
+            <a:r>
+              <a:rPr lang="ko-KR" altLang="en-US" sz="1300" dirty="0">
+                <a:solidFill>
+                  <a:srgbClr val="5C5F6B"/>
+                </a:solidFill>
+                <a:latin typeface="Malgun Gothic" pitchFamily="34" charset="0"/>
+                <a:ea typeface="Malgun Gothic" pitchFamily="34" charset="-122"/>
+                <a:cs typeface="Malgun Gothic" pitchFamily="34" charset="-120"/>
+              </a:rPr>
+              <a:t>선생님</a:t>
+            </a:r>
+            <a:r>
+              <a:rPr lang="en-US" sz="1300" dirty="0">
+                <a:solidFill>
+                  <a:srgbClr val="5C5F6B"/>
+                </a:solidFill>
+              </a:rPr>
+              <a:t>); 4) Jay con su </a:t>
+            </a:r>
+            <a:r>
+              <a:rPr lang="ko-KR" altLang="en-US" sz="1300" dirty="0">
+                <a:solidFill>
+                  <a:srgbClr val="5C5F6B"/>
+                </a:solidFill>
+                <a:latin typeface="Malgun Gothic" pitchFamily="34" charset="0"/>
+                <a:ea typeface="Malgun Gothic" pitchFamily="34" charset="-122"/>
+                <a:cs typeface="Malgun Gothic" pitchFamily="34" charset="-120"/>
+              </a:rPr>
+              <a:t>누나 </a:t>
+            </a:r>
+            <a:r>
+              <a:rPr lang="en-US" sz="1300" dirty="0">
+                <a:solidFill>
+                  <a:srgbClr val="5C5F6B"/>
+                </a:solidFill>
+              </a:rPr>
+              <a:t>o una foto de familia; 5) Jay haciendo ejercicio (</a:t>
+            </a:r>
+            <a:r>
+              <a:rPr lang="ko-KR" altLang="en-US" sz="1300" dirty="0">
+                <a:solidFill>
+                  <a:srgbClr val="5C5F6B"/>
+                </a:solidFill>
+                <a:latin typeface="Malgun Gothic" pitchFamily="34" charset="0"/>
+                <a:ea typeface="Malgun Gothic" pitchFamily="34" charset="-122"/>
+                <a:cs typeface="Malgun Gothic" pitchFamily="34" charset="-120"/>
+              </a:rPr>
+              <a:t>운동</a:t>
+            </a:r>
+            <a:r>
+              <a:rPr lang="en-US" sz="1300" dirty="0">
+                <a:solidFill>
+                  <a:srgbClr val="5C5F6B"/>
+                </a:solidFill>
+              </a:rPr>
+              <a:t>); 6) su perrito </a:t>
+            </a:r>
+            <a:r>
+              <a:rPr lang="ko-KR" altLang="en-US" sz="1300" dirty="0">
+                <a:solidFill>
+                  <a:srgbClr val="5C5F6B"/>
+                </a:solidFill>
+                <a:latin typeface="Malgun Gothic" pitchFamily="34" charset="0"/>
+                <a:ea typeface="Malgun Gothic" pitchFamily="34" charset="-122"/>
+                <a:cs typeface="Malgun Gothic" pitchFamily="34" charset="-120"/>
+              </a:rPr>
+              <a:t>두부</a:t>
+            </a:r>
+            <a:r>
+              <a:rPr lang="en-US" sz="1300" dirty="0">
+                <a:solidFill>
+                  <a:srgbClr val="5C5F6B"/>
+                </a:solidFill>
+              </a:rPr>
+              <a:t>. Fotos horizontales, sin terceros identificables sin su permiso (la clase se graba). Si cambia un dato de la frase (sin mascota, sin hermanos), la foto acompaña su versión. Pegarlas en PowerPoint junto a cada frase, para que aparezcan de a una con la animación.</a:t>
             </a:r>
             <a:endParaRPr lang="en-US" sz="1600" dirty="0"/>
           </a:p>
@@ -23581,7 +23729,7 @@
         <p:spPr>
           <a:xfrm>
             <a:off x="548640" y="1325880"/>
-            <a:ext cx="11064240" cy="548640"/>
+            <a:ext cx="11091672" cy="548640"/>
           </a:xfrm>
           <a:prstGeom prst="rect">
             <a:avLst/>
@@ -24416,7 +24564,7 @@
                 <a:ea typeface="Malgun Gothic" pitchFamily="34" charset="-122"/>
                 <a:cs typeface="Malgun Gothic" pitchFamily="34" charset="-120"/>
               </a:rPr>
-              <a:t>누나가 한 명 있어요</a:t>
+              <a:t>누나가 한 명 있어요</a:t>
             </a:r>
             <a:r>
               <a:rPr lang="en-US" sz="2000" b="1" dirty="0">
@@ -24985,7 +25133,7 @@
         <p:spPr>
           <a:xfrm>
             <a:off x="548640" y="1325880"/>
-            <a:ext cx="11064240" cy="457200"/>
+            <a:ext cx="11091672" cy="457200"/>
           </a:xfrm>
           <a:prstGeom prst="rect">
             <a:avLst/>
@@ -25984,7 +26132,7 @@
         <p:spPr>
           <a:xfrm>
             <a:off x="548640" y="1325880"/>
-            <a:ext cx="11064240" cy="457200"/>
+            <a:ext cx="11091672" cy="457200"/>
           </a:xfrm>
           <a:prstGeom prst="rect">
             <a:avLst/>
@@ -26025,7 +26173,7 @@
           <p:nvPr>
             <p:extLst>
               <p:ext uri="{D42A27DB-BD31-4B8C-83A1-F6EECF244321}">
-                <p14:modId xmlns:p14="http://schemas.microsoft.com/office/powerpoint/2010/main" val="3463727977"/>
+                <p14:modId xmlns:p14="http://schemas.microsoft.com/office/powerpoint/2010/main" val="1621190726"/>
               </p:ext>
             </p:extLst>
           </p:nvPr>
@@ -27279,7 +27427,7 @@
         <p:spPr>
           <a:xfrm>
             <a:off x="548640" y="1325880"/>
-            <a:ext cx="11064240" cy="457200"/>
+            <a:ext cx="11091672" cy="457200"/>
           </a:xfrm>
           <a:prstGeom prst="rect">
             <a:avLst/>

--- a/Curriculo/Fase3_Basico2/decks/Basico2_S01_Jay.pptx
+++ b/Curriculo/Fase3_Basico2/decks/Basico2_S01_Jay.pptx
@@ -133,7 +133,7 @@
   <p:extLst>
     <p:ext uri="{521415D9-36F7-43E2-AB2F-B90AF26B5E84}">
       <p14:sectionLst xmlns:p14="http://schemas.microsoft.com/office/powerpoint/2010/main">
-        <p14:section name="Semana 1" id="{3923E0BA-6F9E-E590-78F5-6A68D00A1D23}">
+        <p14:section name="Semana 1" id="{3F101A7B-14E4-0BD7-ECBA-3E037E12D8BE}">
           <p14:sldIdLst>
             <p14:sldId id="256"/>
             <p14:sldId id="257"/>
@@ -198,7 +198,7 @@
     </p:spTree>
     <p:extLst>
       <p:ext uri="{BB962C8B-B14F-4D97-AF65-F5344CB8AC3E}">
-        <p14:creationId xmlns:p14="http://schemas.microsoft.com/office/powerpoint/2010/main" val="4046545120"/>
+        <p14:creationId xmlns:p14="http://schemas.microsoft.com/office/powerpoint/2010/main" val="3793426929"/>
       </p:ext>
     </p:extLst>
   </p:cSld>
@@ -1684,7 +1684,7 @@
           <a:p>
             <a:r>
               <a:rPr lang="en-US" dirty="0"/>
-              <a:t>21:58–21:59 (1 min 15). Comparte 20 s el Lector (Practicar → chips Sílabas y Batchim; pestaña Progreso). «Unos 30 minutos, antes del miércoles 21: el Lector, 3 rondas seguidas de cada uno, y me mandan la captura con sus estrellas de Escucha (la meta es tres); la Hoja 1, y si la mandan antes del viernes la uso para armar las parejas; un audio de 30 segundos sin leer; y anoten cumpleaños, edad, un teléfono y a qué hora se levantan, almuerzan y se acuestan.» «Quien no conversó hoy conmigo, me manda por privado el audio de diagnóstico antes del domingo: las preguntas están en su material.»
+              <a:t>21:58–21:59 (1 min 15). Comparte 20 s el Lector (Practicar → chips Sílabas y Batchim; pestaña Progreso). «Unos 30 minutos, antes del miércoles 28: el Lector, 3 rondas seguidas de cada uno, y me mandan la captura con sus estrellas de Escucha (la meta es tres); la Hoja 1, y si la mandan antes del viernes la uso para armar las parejas; un audio de 30 segundos sin leer; y anoten cumpleaños, edad, un teléfono y a qué hora se levantan, almuerzan y se acuestan.» «Quien no conversó hoy conmigo, me manda por privado el audio de diagnóstico antes del domingo: las preguntas están en su material.»
 Fuente: Nueva
 Lámina 22</a:t>
             </a:r>
@@ -4366,7 +4366,7 @@
           <p:nvPr>
             <p:extLst>
               <p:ext uri="{D42A27DB-BD31-4B8C-83A1-F6EECF244321}">
-                <p14:modId xmlns:p14="http://schemas.microsoft.com/office/powerpoint/2010/main" val="45013329"/>
+                <p14:modId xmlns:p14="http://schemas.microsoft.com/office/powerpoint/2010/main" val="1919129114"/>
               </p:ext>
             </p:extLst>
           </p:nvPr>
@@ -8363,7 +8363,7 @@
           <p:nvPr>
             <p:extLst>
               <p:ext uri="{D42A27DB-BD31-4B8C-83A1-F6EECF244321}">
-                <p14:modId xmlns:p14="http://schemas.microsoft.com/office/powerpoint/2010/main" val="2129697439"/>
+                <p14:modId xmlns:p14="http://schemas.microsoft.com/office/powerpoint/2010/main" val="2305709512"/>
               </p:ext>
             </p:extLst>
           </p:nvPr>
@@ -9792,7 +9792,7 @@
           <p:nvPr>
             <p:extLst>
               <p:ext uri="{D42A27DB-BD31-4B8C-83A1-F6EECF244321}">
-                <p14:modId xmlns:p14="http://schemas.microsoft.com/office/powerpoint/2010/main" val="3771173691"/>
+                <p14:modId xmlns:p14="http://schemas.microsoft.com/office/powerpoint/2010/main" val="1407504691"/>
               </p:ext>
             </p:extLst>
           </p:nvPr>
@@ -12659,7 +12659,7 @@
           <p:nvPr>
             <p:extLst>
               <p:ext uri="{D42A27DB-BD31-4B8C-83A1-F6EECF244321}">
-                <p14:modId xmlns:p14="http://schemas.microsoft.com/office/powerpoint/2010/main" val="2397444357"/>
+                <p14:modId xmlns:p14="http://schemas.microsoft.com/office/powerpoint/2010/main" val="3913352876"/>
               </p:ext>
             </p:extLst>
           </p:nvPr>
@@ -14446,7 +14446,7 @@
                   <a:srgbClr val="14142B"/>
                 </a:solidFill>
               </a:rPr>
-              <a:t>¿No alcanzamos? Audio de diagnóstico a Jay antes del domingo 18</a:t>
+              <a:t>¿No alcanzamos? Audio de diagnóstico a Jay antes del domingo 25</a:t>
             </a:r>
             <a:endParaRPr lang="en-US" sz="2200" dirty="0"/>
           </a:p>
@@ -14875,7 +14875,7 @@
         </p:nvSpPr>
         <p:spPr>
           <a:xfrm>
-            <a:off x="548640" y="3863340"/>
+            <a:off x="2435352" y="3863340"/>
             <a:ext cx="3544824" cy="2308860"/>
           </a:xfrm>
           <a:prstGeom prst="roundRect">
@@ -14902,7 +14902,7 @@
         </p:nvSpPr>
         <p:spPr>
           <a:xfrm>
-            <a:off x="548640" y="3936492"/>
+            <a:off x="2435352" y="3936492"/>
             <a:ext cx="3544824" cy="1431493"/>
           </a:xfrm>
           <a:prstGeom prst="rect">
@@ -14943,7 +14943,7 @@
         </p:nvSpPr>
         <p:spPr>
           <a:xfrm>
-            <a:off x="4322064" y="3863340"/>
+            <a:off x="6208776" y="3863340"/>
             <a:ext cx="3544824" cy="2308860"/>
           </a:xfrm>
           <a:prstGeom prst="roundRect">
@@ -14970,7 +14970,7 @@
         </p:nvSpPr>
         <p:spPr>
           <a:xfrm>
-            <a:off x="4322064" y="3936492"/>
+            <a:off x="6208776" y="3936492"/>
             <a:ext cx="3544824" cy="1431493"/>
           </a:xfrm>
           <a:prstGeom prst="rect">
@@ -15259,7 +15259,7 @@
                   <a:srgbClr val="E8B84B"/>
                 </a:solidFill>
               </a:rPr>
-              <a:t>Miércoles 14 de octubre de 2026 · 21:00 (hora de Chile)</a:t>
+              <a:t>Miércoles 21 de octubre de 2026 · 21:00 (hora de Chile)</a:t>
             </a:r>
             <a:endParaRPr lang="en-US" sz="2200" dirty="0"/>
           </a:p>
@@ -15720,7 +15720,7 @@
           <p:nvPr>
             <p:extLst>
               <p:ext uri="{D42A27DB-BD31-4B8C-83A1-F6EECF244321}">
-                <p14:modId xmlns:p14="http://schemas.microsoft.com/office/powerpoint/2010/main" val="426681390"/>
+                <p14:modId xmlns:p14="http://schemas.microsoft.com/office/powerpoint/2010/main" val="3596199771"/>
               </p:ext>
             </p:extLst>
           </p:nvPr>
@@ -17357,7 +17357,7 @@
                   <a:srgbClr val="4236F6"/>
                 </a:solidFill>
               </a:rPr>
-              <a:t>Plazo: miércoles 21 de octubre, 21:00 (hora de Chile)</a:t>
+              <a:t>Plazo: miércoles 28 de octubre, 21:00 (hora de Chile)</a:t>
             </a:r>
             <a:endParaRPr lang="en-US" sz="1800" dirty="0"/>
           </a:p>
@@ -17372,7 +17372,7 @@
           <p:nvPr>
             <p:extLst>
               <p:ext uri="{D42A27DB-BD31-4B8C-83A1-F6EECF244321}">
-                <p14:modId xmlns:p14="http://schemas.microsoft.com/office/powerpoint/2010/main" val="3548645203"/>
+                <p14:modId xmlns:p14="http://schemas.microsoft.com/office/powerpoint/2010/main" val="1639549323"/>
               </p:ext>
             </p:extLst>
           </p:nvPr>
@@ -17864,7 +17864,7 @@
                             <a:srgbClr val="14142B"/>
                           </a:solidFill>
                         </a:rPr>
-                        <a:t>Hoja 1: 10 frases + 3 sobre tu familia (antes del vie 16 si puedes)</a:t>
+                        <a:t>Hoja 1: 10 frases + 3 sobre tu familia (antes del vie 23 si puedes)</a:t>
                       </a:r>
                       <a:endParaRPr lang="en-US" sz="1500" dirty="0"/>
                     </a:p>
@@ -18654,7 +18654,7 @@
                             <a:srgbClr val="14142B"/>
                           </a:solidFill>
                         </a:rPr>
-                        <a:t>Audio por privado a Jay antes del domingo 18</a:t>
+                        <a:t>Audio por privado a Jay antes del domingo 25</a:t>
                       </a:r>
                       <a:endParaRPr lang="en-US" sz="1500" dirty="0"/>
                     </a:p>
@@ -21259,7 +21259,7 @@
           <p:nvPr>
             <p:extLst>
               <p:ext uri="{D42A27DB-BD31-4B8C-83A1-F6EECF244321}">
-                <p14:modId xmlns:p14="http://schemas.microsoft.com/office/powerpoint/2010/main" val="2420784766"/>
+                <p14:modId xmlns:p14="http://schemas.microsoft.com/office/powerpoint/2010/main" val="3117827963"/>
               </p:ext>
             </p:extLst>
           </p:nvPr>
@@ -26173,7 +26173,7 @@
           <p:nvPr>
             <p:extLst>
               <p:ext uri="{D42A27DB-BD31-4B8C-83A1-F6EECF244321}">
-                <p14:modId xmlns:p14="http://schemas.microsoft.com/office/powerpoint/2010/main" val="1621190726"/>
+                <p14:modId xmlns:p14="http://schemas.microsoft.com/office/powerpoint/2010/main" val="3605218882"/>
               </p:ext>
             </p:extLst>
           </p:nvPr>
